--- a/Topic_B/Exam_Practice/TB-L09_Speaking_Workshop_Invitations_Holidays_and_Past_Experiences.pptx
+++ b/Topic_B/Exam_Practice/TB-L09_Speaking_Workshop_Invitations_Holidays_and_Past_Experiences.pptx
@@ -615,7 +615,11 @@
           <a:lstStyle/>
           <a:p>
             <a:r>
-              <a:rPr lang="en-US" dirty="0"/>
+              <a:rPr lang="ar-SA" dirty="0">
+                <a:latin typeface="Amiri" pitchFamily="2" charset="-78"/>
+                <a:ea typeface="Amiri" pitchFamily="2" charset="-78"/>
+                <a:cs typeface="Amiri" pitchFamily="2" charset="-78"/>
+              </a:rPr>
               <a:t>ROLE PLAY C (Develop) — after the holiday.
 SET-UP IN THE BREAKOUT ROOM: A = examiner (reads the left column ONLY — the questions, in order), B = candidate (sees the task column; Core may use the help column), C = observer (ticks the feedback checklist). 1 minute preparation, about 3 minutes speaking, 1 minute feedback, then rotate.
 Task ! is the unexpected question: in the exam the candidate has not seen it — the examiner should read it without warning.
@@ -707,7 +711,11 @@
           <a:lstStyle/>
           <a:p>
             <a:r>
-              <a:rPr lang="en-US" dirty="0"/>
+              <a:rPr lang="ar-SA" dirty="0">
+                <a:latin typeface="Amiri" pitchFamily="2" charset="-78"/>
+                <a:ea typeface="Amiri" pitchFamily="2" charset="-78"/>
+                <a:cs typeface="Amiri" pitchFamily="2" charset="-78"/>
+              </a:rPr>
               <a:t>ROLE PLAY D (Stretch) — a culture podcast.
 SET-UP IN THE BREAKOUT ROOM: A = examiner (reads the left column ONLY — the questions, in order), B = candidate (sees the task column; Core may use the help column), C = observer (ticks the feedback checklist). 1 minute preparation, about 3 minutes speaking, 1 minute feedback, then rotate.
 Task ! is the unexpected question: in the exam the candidate has not seen it — the examiner should read it without warning.
@@ -1243,7 +1251,11 @@
           <a:lstStyle/>
           <a:p>
             <a:r>
-              <a:rPr lang="en-US" dirty="0"/>
+              <a:rPr lang="ar-SA" dirty="0">
+                <a:latin typeface="Amiri" pitchFamily="2" charset="-78"/>
+                <a:ea typeface="Amiri" pitchFamily="2" charset="-78"/>
+                <a:cs typeface="Amiri" pitchFamily="2" charset="-78"/>
+              </a:rPr>
               <a:t>TOPIC CONVERSATION — Core. Examiner asks the questions in order and may add “لِمَاذَا؟ / هَلْ يُمْكِنُ أَنْ تَشْرَحَ أَكْثَرَ؟” to push for more. Candidate aims for one full sentence per question.
 </a:t>
             </a:r>
@@ -1332,7 +1344,11 @@
           <a:lstStyle/>
           <a:p>
             <a:r>
-              <a:rPr lang="en-US" dirty="0"/>
+              <a:rPr lang="ar-SA" dirty="0">
+                <a:latin typeface="Amiri" pitchFamily="2" charset="-78"/>
+                <a:ea typeface="Amiri" pitchFamily="2" charset="-78"/>
+                <a:cs typeface="Amiri" pitchFamily="2" charset="-78"/>
+              </a:rPr>
               <a:t>TOPIC CONVERSATION — Develop. Examiner asks the questions in order and may add “لِمَاذَا؟ / هَلْ يُمْكِنُ أَنْ تَشْرَحَ أَكْثَرَ؟” to push for more. Candidate aims for two or three sentences, with sequencing and a reason.
 </a:t>
             </a:r>
@@ -1421,7 +1437,11 @@
           <a:lstStyle/>
           <a:p>
             <a:r>
-              <a:rPr lang="en-US" dirty="0"/>
+              <a:rPr lang="ar-SA" dirty="0">
+                <a:latin typeface="Amiri" pitchFamily="2" charset="-78"/>
+                <a:ea typeface="Amiri" pitchFamily="2" charset="-78"/>
+                <a:cs typeface="Amiri" pitchFamily="2" charset="-78"/>
+              </a:rPr>
               <a:t>TOPIC CONVERSATION — Stretch. Examiner asks the questions in order and may add “لِمَاذَا؟ / هَلْ يُمْكِنُ أَنْ تَشْرَحَ أَكْثَرَ؟” to push for more. Candidate aims for a developed answer: opinion, comparison, concession and a conditional.
 </a:t>
             </a:r>
@@ -1510,7 +1530,11 @@
           <a:lstStyle/>
           <a:p>
             <a:r>
-              <a:rPr lang="en-US" dirty="0"/>
+              <a:rPr lang="ar-SA" dirty="0">
+                <a:latin typeface="Amiri" pitchFamily="2" charset="-78"/>
+                <a:ea typeface="Amiri" pitchFamily="2" charset="-78"/>
+                <a:cs typeface="Amiri" pitchFamily="2" charset="-78"/>
+              </a:rPr>
               <a:t>WELCOME (1 min) — while students join.
 • Greet each student by name as they arrive: السَّلَامُ عَلَيْكُمْ. Take the register (Pastoral Tracker: attendance 0/1).
 • 2-MINUTE CHECK-IN (SEND training): a private chat to any student who seemed unsettled last lesson — “Are you okay today? 👍 / 👎”.
@@ -2224,7 +2248,11 @@
           <a:lstStyle/>
           <a:p>
             <a:r>
-              <a:rPr lang="en-US" dirty="0"/>
+              <a:rPr lang="ar-SA" dirty="0">
+                <a:latin typeface="Amiri" pitchFamily="2" charset="-78"/>
+                <a:ea typeface="Amiri" pitchFamily="2" charset="-78"/>
+                <a:cs typeface="Amiri" pitchFamily="2" charset="-78"/>
+              </a:rPr>
               <a:t>TEACH (3 min). Role play = precise and complete; conversation = develop. Choral repetition of the repair phrases. To a girl: تُعِيدِي.</a:t>
             </a:r>
             <a:endParaRPr lang="en-US" dirty="0"/>
@@ -2312,7 +2340,11 @@
           <a:lstStyle/>
           <a:p>
             <a:r>
-              <a:rPr lang="en-US" dirty="0"/>
+              <a:rPr lang="ar-SA" dirty="0">
+                <a:latin typeface="Amiri" pitchFamily="2" charset="-78"/>
+                <a:ea typeface="Amiri" pitchFamily="2" charset="-78"/>
+                <a:cs typeface="Amiri" pitchFamily="2" charset="-78"/>
+              </a:rPr>
               <a:t>LANGUAGE BANK (2 min) — inviting: أَدْعُوكَ إِلَى … / هَلْ تُحِبُّ أَنْ تَأْتِيَ؟ Accepting: بِكُلِّ سُرُورٍ · شُكْرًا عَلَى الدَّعْوَةِ. Declining politely: آسِفٌ جِدًّا، لَا أَسْتَطِيعُ لِأَنَّ … · إِنْ شَاءَ اللّٰهُ مَرَّةً أُخْرَى.</a:t>
             </a:r>
             <a:endParaRPr lang="en-US" dirty="0"/>
@@ -2400,7 +2432,11 @@
           <a:lstStyle/>
           <a:p>
             <a:r>
-              <a:rPr lang="en-US" dirty="0"/>
+              <a:rPr lang="ar-SA" dirty="0">
+                <a:latin typeface="Amiri" pitchFamily="2" charset="-78"/>
+                <a:ea typeface="Amiri" pitchFamily="2" charset="-78"/>
+                <a:cs typeface="Amiri" pitchFamily="2" charset="-78"/>
+              </a:rPr>
               <a:t>LANGUAGE BANK (2 min) — past “we” verbs end in -nā: احْتَفَلْنَا · قَضَيْنَا · الْتَقَيْنَا. Never forget: لَمْ أَنْسَ (past) · لَنْ أَنْسَى (future). Sequence every story: أَوَّلًا · ثُمَّ · بَعْدَ ذٰلِكَ · أَخِيرًا.</a:t>
             </a:r>
             <a:endParaRPr lang="en-US" dirty="0"/>
@@ -2576,7 +2612,11 @@
           <a:lstStyle/>
           <a:p>
             <a:r>
-              <a:rPr lang="en-US" dirty="0"/>
+              <a:rPr lang="ar-SA" dirty="0">
+                <a:latin typeface="Amiri" pitchFamily="2" charset="-78"/>
+                <a:ea typeface="Amiri" pitchFamily="2" charset="-78"/>
+                <a:cs typeface="Amiri" pitchFamily="2" charset="-78"/>
+              </a:rPr>
               <a:t>ROLE PLAY A (Core) — a birthday invitation.
 SET-UP IN THE BREAKOUT ROOM: A = examiner (reads the left column ONLY — the questions, in order), B = candidate (sees the task column; Core may use the help column), C = observer (ticks the feedback checklist). 1 minute preparation, about 3 minutes speaking, 1 minute feedback, then rotate.
 Task ! is the unexpected question: in the exam the candidate has not seen it — the examiner should read it without warning.
@@ -2668,7 +2708,11 @@
           <a:lstStyle/>
           <a:p>
             <a:r>
-              <a:rPr lang="en-US" dirty="0"/>
+              <a:rPr lang="ar-SA" dirty="0">
+                <a:latin typeface="Amiri" pitchFamily="2" charset="-78"/>
+                <a:ea typeface="Amiri" pitchFamily="2" charset="-78"/>
+                <a:cs typeface="Amiri" pitchFamily="2" charset="-78"/>
+              </a:rPr>
               <a:t>ROLE PLAY B (Core+) — declining politely.
 SET-UP IN THE BREAKOUT ROOM: A = examiner (reads the left column ONLY — the questions, in order), B = candidate (sees the task column; Core may use the help column), C = observer (ticks the feedback checklist). 1 minute preparation, about 3 minutes speaking, 1 minute feedback, then rotate.
 Task ! is the unexpected question: in the exam the candidate has not seen it — the examiner should read it without warning.
@@ -3156,6 +3200,7 @@
                   <a:srgbClr val="D4AF37"/>
                 </a:solidFill>
                 <a:latin typeface="Amiri" pitchFamily="2" charset="-78"/>
+                <a:ea typeface="Amiri" pitchFamily="2" charset="-78"/>
                 <a:cs typeface="Amiri" pitchFamily="2" charset="-78"/>
               </a:rPr>
               <a:t>م</a:t>
@@ -3362,6 +3407,7 @@
                   <a:srgbClr val="D4AF37"/>
                 </a:solidFill>
                 <a:latin typeface="Amiri" pitchFamily="2" charset="-78"/>
+                <a:ea typeface="Amiri" pitchFamily="2" charset="-78"/>
                 <a:cs typeface="Amiri" pitchFamily="2" charset="-78"/>
               </a:rPr>
               <a:t>وَرْشَةُ التَّحَدُّثِ — الدَّعَوَاتُ وَالتَّجَارِبُ</a:t>
@@ -3819,6 +3865,7 @@
                   <a:srgbClr val="D4AF37"/>
                 </a:solidFill>
                 <a:latin typeface="Amiri" pitchFamily="2" charset="-78"/>
+                <a:ea typeface="Amiri" pitchFamily="2" charset="-78"/>
                 <a:cs typeface="Amiri" pitchFamily="2" charset="-78"/>
               </a:rPr>
               <a:t>م</a:t>
@@ -4139,6 +4186,7 @@
                   <a:srgbClr val="8A6D1E"/>
                 </a:solidFill>
                 <a:latin typeface="Amiri" pitchFamily="2" charset="-78"/>
+                <a:ea typeface="Amiri" pitchFamily="2" charset="-78"/>
                 <a:cs typeface="Amiri" pitchFamily="2" charset="-78"/>
               </a:rPr>
               <a:t>يَوْمٌ لَا أَنْسَاهُ</a:t>
@@ -4419,6 +4467,7 @@
                   <a:srgbClr val="1B3B6F"/>
                 </a:solidFill>
                 <a:latin typeface="Amiri" pitchFamily="2" charset="-78"/>
+                <a:ea typeface="Amiri" pitchFamily="2" charset="-78"/>
                 <a:cs typeface="Amiri" pitchFamily="2" charset="-78"/>
               </a:rPr>
               <a:t>كَانَتْ … لِأَنَّ …</a:t>
@@ -4495,6 +4544,7 @@
                   <a:srgbClr val="1B3B6F"/>
                 </a:solidFill>
                 <a:latin typeface="Amiri" pitchFamily="2" charset="-78"/>
+                <a:ea typeface="Amiri" pitchFamily="2" charset="-78"/>
                 <a:cs typeface="Amiri" pitchFamily="2" charset="-78"/>
               </a:rPr>
               <a:t>كَيْفَ كَانَتِ العُطْلَةُ؟</a:t>
@@ -4598,6 +4648,7 @@
                   <a:srgbClr val="1B3B6F"/>
                 </a:solidFill>
                 <a:latin typeface="Amiri" pitchFamily="2" charset="-78"/>
+                <a:ea typeface="Amiri" pitchFamily="2" charset="-78"/>
                 <a:cs typeface="Amiri" pitchFamily="2" charset="-78"/>
               </a:rPr>
               <a:t>أَوَّلًا … ثُمَّ … بَعْدَ ذٰلِكَ …</a:t>
@@ -4674,6 +4725,7 @@
                   <a:srgbClr val="1B3B6F"/>
                 </a:solidFill>
                 <a:latin typeface="Amiri" pitchFamily="2" charset="-78"/>
+                <a:ea typeface="Amiri" pitchFamily="2" charset="-78"/>
                 <a:cs typeface="Amiri" pitchFamily="2" charset="-78"/>
               </a:rPr>
               <a:t>مَاذَا فَعَلْتُمْ يَوْمَ العِيدِ؟</a:t>
@@ -4777,6 +4829,7 @@
                   <a:srgbClr val="1B3B6F"/>
                 </a:solidFill>
                 <a:latin typeface="Amiri" pitchFamily="2" charset="-78"/>
+                <a:ea typeface="Amiri" pitchFamily="2" charset="-78"/>
                 <a:cs typeface="Amiri" pitchFamily="2" charset="-78"/>
               </a:rPr>
               <a:t>أَجْمَلُ لَحْظَةٍ كَانَتْ عِنْدَمَا …</a:t>
@@ -4853,6 +4906,7 @@
                   <a:srgbClr val="1B3B6F"/>
                 </a:solidFill>
                 <a:latin typeface="Amiri" pitchFamily="2" charset="-78"/>
+                <a:ea typeface="Amiri" pitchFamily="2" charset="-78"/>
                 <a:cs typeface="Amiri" pitchFamily="2" charset="-78"/>
               </a:rPr>
               <a:t>وَمَا أَجْمَلُ لَحْظَةٍ؟</a:t>
@@ -4956,6 +5010,7 @@
                   <a:srgbClr val="1B3B6F"/>
                 </a:solidFill>
                 <a:latin typeface="Amiri" pitchFamily="2" charset="-78"/>
+                <a:ea typeface="Amiri" pitchFamily="2" charset="-78"/>
                 <a:cs typeface="Amiri" pitchFamily="2" charset="-78"/>
               </a:rPr>
               <a:t>لِمَاذَا؟ هَلْ …؟</a:t>
@@ -5032,6 +5087,7 @@
                   <a:srgbClr val="1B3B6F"/>
                 </a:solidFill>
                 <a:latin typeface="Amiri" pitchFamily="2" charset="-78"/>
+                <a:ea typeface="Amiri" pitchFamily="2" charset="-78"/>
                 <a:cs typeface="Amiri" pitchFamily="2" charset="-78"/>
               </a:rPr>
               <a:t>… أَنَا بَقِيتُ فِي البَيْتِ.</a:t>
@@ -5135,6 +5191,7 @@
                   <a:srgbClr val="1B3B6F"/>
                 </a:solidFill>
                 <a:latin typeface="Amiri" pitchFamily="2" charset="-78"/>
+                <a:ea typeface="Amiri" pitchFamily="2" charset="-78"/>
                 <a:cs typeface="Amiri" pitchFamily="2" charset="-78"/>
               </a:rPr>
               <a:t>سَنَحْتَفِلُ … هَلْ تُحِبُّ أَنْ …؟</a:t>
@@ -5211,6 +5268,7 @@
                   <a:srgbClr val="1B3B6F"/>
                 </a:solidFill>
                 <a:latin typeface="Amiri" pitchFamily="2" charset="-78"/>
+                <a:ea typeface="Amiri" pitchFamily="2" charset="-78"/>
                 <a:cs typeface="Amiri" pitchFamily="2" charset="-78"/>
               </a:rPr>
               <a:t>مَاذَا سَتَفْعَلُ فِي العِيدِ القَادِمِ؟</a:t>
@@ -5420,6 +5478,7 @@
                   <a:srgbClr val="D4AF37"/>
                 </a:solidFill>
                 <a:latin typeface="Amiri" pitchFamily="2" charset="-78"/>
+                <a:ea typeface="Amiri" pitchFamily="2" charset="-78"/>
                 <a:cs typeface="Amiri" pitchFamily="2" charset="-78"/>
               </a:rPr>
               <a:t>م</a:t>
@@ -5740,6 +5799,7 @@
                   <a:srgbClr val="8A6D1E"/>
                 </a:solidFill>
                 <a:latin typeface="Amiri" pitchFamily="2" charset="-78"/>
+                <a:ea typeface="Amiri" pitchFamily="2" charset="-78"/>
                 <a:cs typeface="Amiri" pitchFamily="2" charset="-78"/>
               </a:rPr>
               <a:t>الاحْتِفَالَاتُ بَيْنَ الأَمْسِ وَاليَوْمِ</a:t>
@@ -6020,6 +6080,7 @@
                   <a:srgbClr val="1B3B6F"/>
                 </a:solidFill>
                 <a:latin typeface="Amiri" pitchFamily="2" charset="-78"/>
+                <a:ea typeface="Amiri" pitchFamily="2" charset="-78"/>
                 <a:cs typeface="Amiri" pitchFamily="2" charset="-78"/>
               </a:rPr>
               <a:t>لَنْ أَنْسَى … فَقَدْ … ثُمَّ …</a:t>
@@ -6096,6 +6157,7 @@
                   <a:srgbClr val="1B3B6F"/>
                 </a:solidFill>
                 <a:latin typeface="Amiri" pitchFamily="2" charset="-78"/>
+                <a:ea typeface="Amiri" pitchFamily="2" charset="-78"/>
                 <a:cs typeface="Amiri" pitchFamily="2" charset="-78"/>
               </a:rPr>
               <a:t>صِفْ لَنَا احْتِفَالًا عَائِلِيًّا لَا تَنْسَاهُ.</a:t>
@@ -6199,6 +6261,7 @@
                   <a:srgbClr val="1B3B6F"/>
                 </a:solidFill>
                 <a:latin typeface="Amiri" pitchFamily="2" charset="-78"/>
+                <a:ea typeface="Amiri" pitchFamily="2" charset="-78"/>
                 <a:cs typeface="Amiri" pitchFamily="2" charset="-78"/>
               </a:rPr>
               <a:t>كَانَتْ … أَمَّا اليَوْمَ فَتَكُونُ …</a:t>
@@ -6275,6 +6338,7 @@
                   <a:srgbClr val="1B3B6F"/>
                 </a:solidFill>
                 <a:latin typeface="Amiri" pitchFamily="2" charset="-78"/>
+                <a:ea typeface="Amiri" pitchFamily="2" charset="-78"/>
                 <a:cs typeface="Amiri" pitchFamily="2" charset="-78"/>
               </a:rPr>
               <a:t>هَلْ تَغَيَّرَتِ الأَعْرَاسُ عَنِ المَاضِي؟</a:t>
@@ -6378,6 +6442,7 @@
                   <a:srgbClr val="1B3B6F"/>
                 </a:solidFill>
                 <a:latin typeface="Amiri" pitchFamily="2" charset="-78"/>
+                <a:ea typeface="Amiri" pitchFamily="2" charset="-78"/>
                 <a:cs typeface="Amiri" pitchFamily="2" charset="-78"/>
               </a:rPr>
               <a:t>صَحِيحٌ أَنَّ … غَيْرَ أَنَّ …</a:t>
@@ -6454,6 +6519,7 @@
                   <a:srgbClr val="1B3B6F"/>
                 </a:solidFill>
                 <a:latin typeface="Amiri" pitchFamily="2" charset="-78"/>
+                <a:ea typeface="Amiri" pitchFamily="2" charset="-78"/>
                 <a:cs typeface="Amiri" pitchFamily="2" charset="-78"/>
               </a:rPr>
               <a:t>هَلِ الحَفَلَاتُ الكَبِيرَةُ ضَرُورِيَّةٌ؟</a:t>
@@ -6557,6 +6623,7 @@
                   <a:srgbClr val="1B3B6F"/>
                 </a:solidFill>
                 <a:latin typeface="Amiri" pitchFamily="2" charset="-78"/>
+                <a:ea typeface="Amiri" pitchFamily="2" charset="-78"/>
                 <a:cs typeface="Amiri" pitchFamily="2" charset="-78"/>
               </a:rPr>
               <a:t>أَصْبَحَ النَّاسُ … فَمَثَلًا …</a:t>
@@ -6633,6 +6700,7 @@
                   <a:srgbClr val="1B3B6F"/>
                 </a:solidFill>
                 <a:latin typeface="Amiri" pitchFamily="2" charset="-78"/>
+                <a:ea typeface="Amiri" pitchFamily="2" charset="-78"/>
                 <a:cs typeface="Amiri" pitchFamily="2" charset="-78"/>
               </a:rPr>
               <a:t>كَيْفَ تُغَيِّرُ وَسَائِلُ التَّوَاصُلِ احْتِفَالَاتِنَا؟</a:t>
@@ -6736,6 +6804,7 @@
                   <a:srgbClr val="1B3B6F"/>
                 </a:solidFill>
                 <a:latin typeface="Amiri" pitchFamily="2" charset="-78"/>
+                <a:ea typeface="Amiri" pitchFamily="2" charset="-78"/>
                 <a:cs typeface="Amiri" pitchFamily="2" charset="-78"/>
               </a:rPr>
               <a:t>لَوْ نَظَّمْتُ …، لَجَعَلْتُهَا …</a:t>
@@ -6812,6 +6881,7 @@
                   <a:srgbClr val="1B3B6F"/>
                 </a:solidFill>
                 <a:latin typeface="Amiri" pitchFamily="2" charset="-78"/>
+                <a:ea typeface="Amiri" pitchFamily="2" charset="-78"/>
                 <a:cs typeface="Amiri" pitchFamily="2" charset="-78"/>
               </a:rPr>
               <a:t>لَوْ نَظَّمْتَ حَفْلَةً مِثَالِيَّةً، كَيْفَ تَكُونُ؟</a:t>
@@ -7021,6 +7091,7 @@
                   <a:srgbClr val="D4AF37"/>
                 </a:solidFill>
                 <a:latin typeface="Amiri" pitchFamily="2" charset="-78"/>
+                <a:ea typeface="Amiri" pitchFamily="2" charset="-78"/>
                 <a:cs typeface="Amiri" pitchFamily="2" charset="-78"/>
               </a:rPr>
               <a:t>م</a:t>
@@ -7341,6 +7412,7 @@
                   <a:srgbClr val="8A6D1E"/>
                 </a:solidFill>
                 <a:latin typeface="Amiri" pitchFamily="2" charset="-78"/>
+                <a:ea typeface="Amiri" pitchFamily="2" charset="-78"/>
                 <a:cs typeface="Amiri" pitchFamily="2" charset="-78"/>
               </a:rPr>
               <a:t>وَرَقَةُ المُلَاحِظِ</a:t>
@@ -8811,6 +8883,7 @@
                   <a:srgbClr val="D4AF37"/>
                 </a:solidFill>
                 <a:latin typeface="Amiri" pitchFamily="2" charset="-78"/>
+                <a:ea typeface="Amiri" pitchFamily="2" charset="-78"/>
                 <a:cs typeface="Amiri" pitchFamily="2" charset="-78"/>
               </a:rPr>
               <a:t>م</a:t>
@@ -9131,6 +9204,7 @@
                   <a:srgbClr val="8A6D1E"/>
                 </a:solidFill>
                 <a:latin typeface="Amiri" pitchFamily="2" charset="-78"/>
+                <a:ea typeface="Amiri" pitchFamily="2" charset="-78"/>
                 <a:cs typeface="Amiri" pitchFamily="2" charset="-78"/>
               </a:rPr>
               <a:t>نَمُوذَجُ الإِجَابَةِ</a:t>
@@ -9373,6 +9447,7 @@
                   <a:srgbClr val="1B3B6F"/>
                 </a:solidFill>
                 <a:latin typeface="Amiri" pitchFamily="2" charset="-78"/>
+                <a:ea typeface="Amiri" pitchFamily="2" charset="-78"/>
                 <a:cs typeface="Amiri" pitchFamily="2" charset="-78"/>
               </a:rPr>
               <a:t>أَدْعُوكَ إِلَى حَفْلَةِ عِيدِ مِيلَادِي يَوْمَ السَّبْتِ!</a:t>
@@ -9449,6 +9524,7 @@
                   <a:srgbClr val="1B3B6F"/>
                 </a:solidFill>
                 <a:latin typeface="Amiri" pitchFamily="2" charset="-78"/>
+                <a:ea typeface="Amiri" pitchFamily="2" charset="-78"/>
                 <a:cs typeface="Amiri" pitchFamily="2" charset="-78"/>
               </a:rPr>
               <a:t>أَهْلًا! مَا الأَخْبَارُ؟</a:t>
@@ -9552,6 +9628,7 @@
                   <a:srgbClr val="1B3B6F"/>
                 </a:solidFill>
                 <a:latin typeface="Amiri" pitchFamily="2" charset="-78"/>
+                <a:ea typeface="Amiri" pitchFamily="2" charset="-78"/>
                 <a:cs typeface="Amiri" pitchFamily="2" charset="-78"/>
               </a:rPr>
               <a:t>فِي السَّاعَةِ الرَّابِعَةِ بَعْدَ الظُّهْرِ.</a:t>
@@ -9628,6 +9705,7 @@
                   <a:srgbClr val="1B3B6F"/>
                 </a:solidFill>
                 <a:latin typeface="Amiri" pitchFamily="2" charset="-78"/>
+                <a:ea typeface="Amiri" pitchFamily="2" charset="-78"/>
                 <a:cs typeface="Amiri" pitchFamily="2" charset="-78"/>
               </a:rPr>
               <a:t>رَائِعٌ! فِي أَيِّ سَاعَةٍ؟</a:t>
@@ -9731,6 +9809,7 @@
                   <a:srgbClr val="1B3B6F"/>
                 </a:solidFill>
                 <a:latin typeface="Amiri" pitchFamily="2" charset="-78"/>
+                <a:ea typeface="Amiri" pitchFamily="2" charset="-78"/>
                 <a:cs typeface="Amiri" pitchFamily="2" charset="-78"/>
               </a:rPr>
               <a:t>فِي بَيْتِي، وَهُوَ قَرِيبٌ مِنَ المَسْجِدِ الكَبِيرِ.</a:t>
@@ -9807,6 +9886,7 @@
                   <a:srgbClr val="1B3B6F"/>
                 </a:solidFill>
                 <a:latin typeface="Amiri" pitchFamily="2" charset="-78"/>
+                <a:ea typeface="Amiri" pitchFamily="2" charset="-78"/>
                 <a:cs typeface="Amiri" pitchFamily="2" charset="-78"/>
               </a:rPr>
               <a:t>وَأَيْنَ؟</a:t>
@@ -9910,6 +9990,7 @@
                   <a:srgbClr val="1B3B6F"/>
                 </a:solidFill>
                 <a:latin typeface="Amiri" pitchFamily="2" charset="-78"/>
+                <a:ea typeface="Amiri" pitchFamily="2" charset="-78"/>
                 <a:cs typeface="Amiri" pitchFamily="2" charset="-78"/>
               </a:rPr>
               <a:t>سَنَأْكُلُ البِيتْزَا وَالكَعْكَ، وَسَنَلْعَبُ أَلْعَابًا فِي الحَدِيقَةِ.</a:t>
@@ -9986,6 +10067,7 @@
                   <a:srgbClr val="1B3B6F"/>
                 </a:solidFill>
                 <a:latin typeface="Amiri" pitchFamily="2" charset="-78"/>
+                <a:ea typeface="Amiri" pitchFamily="2" charset="-78"/>
                 <a:cs typeface="Amiri" pitchFamily="2" charset="-78"/>
               </a:rPr>
               <a:t>مَاذَا سَنَفْعَلُ فِي الحَفْلَةِ؟</a:t>
@@ -10089,6 +10171,7 @@
                   <a:srgbClr val="1B3B6F"/>
                 </a:solidFill>
                 <a:latin typeface="Amiri" pitchFamily="2" charset="-78"/>
+                <a:ea typeface="Amiri" pitchFamily="2" charset="-78"/>
                 <a:cs typeface="Amiri" pitchFamily="2" charset="-78"/>
               </a:rPr>
               <a:t>لَا شَيْءَ، أُرِيدُ أَنْ تَأْتِيَ فَقَطْ! لٰكِنِّي أُحِبُّ الكُتُبَ.</a:t>
@@ -10165,6 +10248,7 @@
                   <a:srgbClr val="1B3B6F"/>
                 </a:solidFill>
                 <a:latin typeface="Amiri" pitchFamily="2" charset="-78"/>
+                <a:ea typeface="Amiri" pitchFamily="2" charset="-78"/>
                 <a:cs typeface="Amiri" pitchFamily="2" charset="-78"/>
               </a:rPr>
               <a:t>مَاذَا تُرِيدُ هَدِيَّةً؟</a:t>
@@ -10374,6 +10458,7 @@
                   <a:srgbClr val="D4AF37"/>
                 </a:solidFill>
                 <a:latin typeface="Amiri" pitchFamily="2" charset="-78"/>
+                <a:ea typeface="Amiri" pitchFamily="2" charset="-78"/>
                 <a:cs typeface="Amiri" pitchFamily="2" charset="-78"/>
               </a:rPr>
               <a:t>م</a:t>
@@ -10694,6 +10779,7 @@
                   <a:srgbClr val="8A6D1E"/>
                 </a:solidFill>
                 <a:latin typeface="Amiri" pitchFamily="2" charset="-78"/>
+                <a:ea typeface="Amiri" pitchFamily="2" charset="-78"/>
                 <a:cs typeface="Amiri" pitchFamily="2" charset="-78"/>
               </a:rPr>
               <a:t>نَمُوذَجُ الإِجَابَةِ</a:t>
@@ -10936,6 +11022,7 @@
                   <a:srgbClr val="1B3B6F"/>
                 </a:solidFill>
                 <a:latin typeface="Amiri" pitchFamily="2" charset="-78"/>
+                <a:ea typeface="Amiri" pitchFamily="2" charset="-78"/>
                 <a:cs typeface="Amiri" pitchFamily="2" charset="-78"/>
               </a:rPr>
               <a:t>شُكْرًا جَزِيلًا عَلَى الدَّعْوَةِ، وَأَلْفُ مَبْرُوكٍ!</a:t>
@@ -11012,6 +11099,7 @@
                   <a:srgbClr val="1B3B6F"/>
                 </a:solidFill>
                 <a:latin typeface="Amiri" pitchFamily="2" charset="-78"/>
+                <a:ea typeface="Amiri" pitchFamily="2" charset="-78"/>
                 <a:cs typeface="Amiri" pitchFamily="2" charset="-78"/>
               </a:rPr>
               <a:t>نَدْعُوكُمْ إِلَى زِفَافِ ابْنَتِنَا يَوْمَ الجُمُعَةِ.</a:t>
@@ -11115,6 +11203,7 @@
                   <a:srgbClr val="1B3B6F"/>
                 </a:solidFill>
                 <a:latin typeface="Amiri" pitchFamily="2" charset="-78"/>
+                <a:ea typeface="Amiri" pitchFamily="2" charset="-78"/>
                 <a:cs typeface="Amiri" pitchFamily="2" charset="-78"/>
               </a:rPr>
               <a:t>آسِفٌ جِدًّا، لَا نَسْتَطِيعُ أَنْ نَأْتِيَ، لِأَنَّنَا سَنُسَافِرُ إِلَى مِصْرَ يَوْمَ الخَمِيسِ.</a:t>
@@ -11191,6 +11280,7 @@
                   <a:srgbClr val="1B3B6F"/>
                 </a:solidFill>
                 <a:latin typeface="Amiri" pitchFamily="2" charset="-78"/>
+                <a:ea typeface="Amiri" pitchFamily="2" charset="-78"/>
                 <a:cs typeface="Amiri" pitchFamily="2" charset="-78"/>
               </a:rPr>
               <a:t>هَلْ سَتَأْتُونَ؟</a:t>
@@ -11294,6 +11384,7 @@
                   <a:srgbClr val="1B3B6F"/>
                 </a:solidFill>
                 <a:latin typeface="Amiri" pitchFamily="2" charset="-78"/>
+                <a:ea typeface="Amiri" pitchFamily="2" charset="-78"/>
                 <a:cs typeface="Amiri" pitchFamily="2" charset="-78"/>
               </a:rPr>
               <a:t>سَنَرْجِعُ بَعْدَ أُسْبُوعَيْنِ، فِي بِدَايَةِ الشَّهْرِ القَادِمِ.</a:t>
@@ -11370,6 +11461,7 @@
                   <a:srgbClr val="1B3B6F"/>
                 </a:solidFill>
                 <a:latin typeface="Amiri" pitchFamily="2" charset="-78"/>
+                <a:ea typeface="Amiri" pitchFamily="2" charset="-78"/>
                 <a:cs typeface="Amiri" pitchFamily="2" charset="-78"/>
               </a:rPr>
               <a:t>لِلْأَسَفِ! وَمَتَى سَتَرْجِعُونَ؟</a:t>
@@ -11473,6 +11565,7 @@
                   <a:srgbClr val="1B3B6F"/>
                 </a:solidFill>
                 <a:latin typeface="Amiri" pitchFamily="2" charset="-78"/>
+                <a:ea typeface="Amiri" pitchFamily="2" charset="-78"/>
                 <a:cs typeface="Amiri" pitchFamily="2" charset="-78"/>
               </a:rPr>
               <a:t>بِكُلِّ سُرُورٍ! مَا رَأْيُكِ أَنْ نَزُورَكُمْ فِي أَوَّلِ جُمُعَةٍ بَعْدَ رُجُوعِنَا؟</a:t>
@@ -11549,6 +11642,7 @@
                   <a:srgbClr val="1B3B6F"/>
                 </a:solidFill>
                 <a:latin typeface="Amiri" pitchFamily="2" charset="-78"/>
+                <a:ea typeface="Amiri" pitchFamily="2" charset="-78"/>
                 <a:cs typeface="Amiri" pitchFamily="2" charset="-78"/>
               </a:rPr>
               <a:t>لَا بَأْسَ، إِنْ شَاءَ اللّٰهُ تَزُورُونَنَا بَعْدَ ذٰلِكَ.</a:t>
@@ -11652,6 +11746,7 @@
                   <a:srgbClr val="1B3B6F"/>
                 </a:solidFill>
                 <a:latin typeface="Amiri" pitchFamily="2" charset="-78"/>
+                <a:ea typeface="Amiri" pitchFamily="2" charset="-78"/>
                 <a:cs typeface="Amiri" pitchFamily="2" charset="-78"/>
               </a:rPr>
               <a:t>نَعَمْ، حَضَرْتُ زِفَافَ خَالِي فِي عَمَّانَ، وَكَانَ رَائِعًا، وَرَقَصْنَا الدَّبْكَةَ حَتَّى الفَجْرِ!</a:t>
@@ -11728,6 +11823,7 @@
                   <a:srgbClr val="1B3B6F"/>
                 </a:solidFill>
                 <a:latin typeface="Amiri" pitchFamily="2" charset="-78"/>
+                <a:ea typeface="Amiri" pitchFamily="2" charset="-78"/>
                 <a:cs typeface="Amiri" pitchFamily="2" charset="-78"/>
               </a:rPr>
               <a:t>هَلْ حَضَرْتَ زِفَافًا عَرَبِيًّا مِنْ قَبْلُ؟</a:t>
@@ -11937,6 +12033,7 @@
                   <a:srgbClr val="D4AF37"/>
                 </a:solidFill>
                 <a:latin typeface="Amiri" pitchFamily="2" charset="-78"/>
+                <a:ea typeface="Amiri" pitchFamily="2" charset="-78"/>
                 <a:cs typeface="Amiri" pitchFamily="2" charset="-78"/>
               </a:rPr>
               <a:t>م</a:t>
@@ -12257,6 +12354,7 @@
                   <a:srgbClr val="8A6D1E"/>
                 </a:solidFill>
                 <a:latin typeface="Amiri" pitchFamily="2" charset="-78"/>
+                <a:ea typeface="Amiri" pitchFamily="2" charset="-78"/>
                 <a:cs typeface="Amiri" pitchFamily="2" charset="-78"/>
               </a:rPr>
               <a:t>نَمُوذَجُ الإِجَابَةِ</a:t>
@@ -12499,6 +12597,7 @@
                   <a:srgbClr val="1B3B6F"/>
                 </a:solidFill>
                 <a:latin typeface="Amiri" pitchFamily="2" charset="-78"/>
+                <a:ea typeface="Amiri" pitchFamily="2" charset="-78"/>
                 <a:cs typeface="Amiri" pitchFamily="2" charset="-78"/>
               </a:rPr>
               <a:t>كَانَتْ رَائِعَةً، لِأَنَّنَا احْتَفَلْنَا بِعِيدِ الفِطْرِ مَعَ كُلِّ العَائِلَةِ فِي بَيْتِ جَدِّي.</a:t>
@@ -12575,6 +12674,7 @@
                   <a:srgbClr val="1B3B6F"/>
                 </a:solidFill>
                 <a:latin typeface="Amiri" pitchFamily="2" charset="-78"/>
+                <a:ea typeface="Amiri" pitchFamily="2" charset="-78"/>
                 <a:cs typeface="Amiri" pitchFamily="2" charset="-78"/>
               </a:rPr>
               <a:t>كَيْفَ كَانَتِ العُطْلَةُ؟</a:t>
@@ -12678,6 +12778,7 @@
                   <a:srgbClr val="1B3B6F"/>
                 </a:solidFill>
                 <a:latin typeface="Amiri" pitchFamily="2" charset="-78"/>
+                <a:ea typeface="Amiri" pitchFamily="2" charset="-78"/>
                 <a:cs typeface="Amiri" pitchFamily="2" charset="-78"/>
               </a:rPr>
               <a:t>أَوَّلًا صَلَّيْنَا صَلَاةَ العِيدِ، ثُمَّ زُرْنَا الأَقَارِبَ، وَبَعْدَ ذٰلِكَ تَغَدَّيْنَا مَعًا فِي الحَدِيقَةِ.</a:t>
@@ -12754,6 +12855,7 @@
                   <a:srgbClr val="1B3B6F"/>
                 </a:solidFill>
                 <a:latin typeface="Amiri" pitchFamily="2" charset="-78"/>
+                <a:ea typeface="Amiri" pitchFamily="2" charset="-78"/>
                 <a:cs typeface="Amiri" pitchFamily="2" charset="-78"/>
               </a:rPr>
               <a:t>مَاذَا فَعَلْتُمْ يَوْمَ العِيدِ؟</a:t>
@@ -12857,6 +12959,7 @@
                   <a:srgbClr val="1B3B6F"/>
                 </a:solidFill>
                 <a:latin typeface="Amiri" pitchFamily="2" charset="-78"/>
+                <a:ea typeface="Amiri" pitchFamily="2" charset="-78"/>
                 <a:cs typeface="Amiri" pitchFamily="2" charset="-78"/>
               </a:rPr>
               <a:t>أَجْمَلُ لَحْظَةٍ كَانَتْ عِنْدَمَا وَصَلَ عَمِّي مِنْ كَنَدَا مُفَاجَأَةً، وَلَمْ يَكُنْ أَحَدٌ يَعْرِفُ!</a:t>
@@ -12933,6 +13036,7 @@
                   <a:srgbClr val="1B3B6F"/>
                 </a:solidFill>
                 <a:latin typeface="Amiri" pitchFamily="2" charset="-78"/>
+                <a:ea typeface="Amiri" pitchFamily="2" charset="-78"/>
                 <a:cs typeface="Amiri" pitchFamily="2" charset="-78"/>
               </a:rPr>
               <a:t>وَمَا أَجْمَلُ لَحْظَةٍ؟</a:t>
@@ -13036,6 +13140,7 @@
                   <a:srgbClr val="1B3B6F"/>
                 </a:solidFill>
                 <a:latin typeface="Amiri" pitchFamily="2" charset="-78"/>
+                <a:ea typeface="Amiri" pitchFamily="2" charset="-78"/>
                 <a:cs typeface="Amiri" pitchFamily="2" charset="-78"/>
               </a:rPr>
               <a:t>لِمَاذَا؟ هَلْ كُنْتَ مَرِيضًا؟</a:t>
@@ -13112,6 +13217,7 @@
                   <a:srgbClr val="1B3B6F"/>
                 </a:solidFill>
                 <a:latin typeface="Amiri" pitchFamily="2" charset="-78"/>
+                <a:ea typeface="Amiri" pitchFamily="2" charset="-78"/>
                 <a:cs typeface="Amiri" pitchFamily="2" charset="-78"/>
               </a:rPr>
               <a:t>… أَنَا بَقِيتُ فِي البَيْتِ.</a:t>
@@ -13215,6 +13321,7 @@
                   <a:srgbClr val="1B3B6F"/>
                 </a:solidFill>
                 <a:latin typeface="Amiri" pitchFamily="2" charset="-78"/>
+                <a:ea typeface="Amiri" pitchFamily="2" charset="-78"/>
                 <a:cs typeface="Amiri" pitchFamily="2" charset="-78"/>
               </a:rPr>
               <a:t>سَنَحْتَفِلُ فِي بَيْتِنَا هٰذِهِ المَرَّةَ، فَهَلْ تُحِبُّ أَنْ تَأْتِيَ مَعَ أُسْرَتِكَ؟</a:t>
@@ -13291,6 +13398,7 @@
                   <a:srgbClr val="1B3B6F"/>
                 </a:solidFill>
                 <a:latin typeface="Amiri" pitchFamily="2" charset="-78"/>
+                <a:ea typeface="Amiri" pitchFamily="2" charset="-78"/>
                 <a:cs typeface="Amiri" pitchFamily="2" charset="-78"/>
               </a:rPr>
               <a:t>مَاذَا سَتَفْعَلُ فِي العِيدِ القَادِمِ؟</a:t>
@@ -13500,6 +13608,7 @@
                   <a:srgbClr val="D4AF37"/>
                 </a:solidFill>
                 <a:latin typeface="Amiri" pitchFamily="2" charset="-78"/>
+                <a:ea typeface="Amiri" pitchFamily="2" charset="-78"/>
                 <a:cs typeface="Amiri" pitchFamily="2" charset="-78"/>
               </a:rPr>
               <a:t>م</a:t>
@@ -13820,6 +13929,7 @@
                   <a:srgbClr val="8A6D1E"/>
                 </a:solidFill>
                 <a:latin typeface="Amiri" pitchFamily="2" charset="-78"/>
+                <a:ea typeface="Amiri" pitchFamily="2" charset="-78"/>
                 <a:cs typeface="Amiri" pitchFamily="2" charset="-78"/>
               </a:rPr>
               <a:t>نَمُوذَجُ الإِجَابَةِ</a:t>
@@ -14062,6 +14172,7 @@
                   <a:srgbClr val="1B3B6F"/>
                 </a:solidFill>
                 <a:latin typeface="Amiri" pitchFamily="2" charset="-78"/>
+                <a:ea typeface="Amiri" pitchFamily="2" charset="-78"/>
                 <a:cs typeface="Amiri" pitchFamily="2" charset="-78"/>
               </a:rPr>
               <a:t>لَنْ أَنْسَى زِفَافَ أُخْتِي؛ فَقَدِ اجْتَمَعَ أَكْثَرُ مِنْ مِئَتَيْ شَخْصٍ، ثُمَّ غَنَّتْ جَدَّتِي أُغْنِيَةً قَدِيمَةً فَبَكَى الجَمِيعُ.</a:t>
@@ -14138,6 +14249,7 @@
                   <a:srgbClr val="1B3B6F"/>
                 </a:solidFill>
                 <a:latin typeface="Amiri" pitchFamily="2" charset="-78"/>
+                <a:ea typeface="Amiri" pitchFamily="2" charset="-78"/>
                 <a:cs typeface="Amiri" pitchFamily="2" charset="-78"/>
               </a:rPr>
               <a:t>صِفْ لَنَا احْتِفَالًا عَائِلِيًّا لَا تَنْسَاهُ.</a:t>
@@ -14241,6 +14353,7 @@
                   <a:srgbClr val="1B3B6F"/>
                 </a:solidFill>
                 <a:latin typeface="Amiri" pitchFamily="2" charset="-78"/>
+                <a:ea typeface="Amiri" pitchFamily="2" charset="-78"/>
                 <a:cs typeface="Amiri" pitchFamily="2" charset="-78"/>
               </a:rPr>
               <a:t>كَانَتِ الأَعْرَاسُ تَسْتَمِرُّ سَبْعَةَ أَيَّامٍ فِي القَرْيَةِ، أَمَّا اليَوْمَ فَتَكُونُ لَيْلَةً وَاحِدَةً فِي قَاعَةٍ فَاخِرَةٍ.</a:t>
@@ -14317,6 +14430,7 @@
                   <a:srgbClr val="1B3B6F"/>
                 </a:solidFill>
                 <a:latin typeface="Amiri" pitchFamily="2" charset="-78"/>
+                <a:ea typeface="Amiri" pitchFamily="2" charset="-78"/>
                 <a:cs typeface="Amiri" pitchFamily="2" charset="-78"/>
               </a:rPr>
               <a:t>هَلْ تَغَيَّرَتِ الأَعْرَاسُ عَنِ المَاضِي؟</a:t>
@@ -14420,6 +14534,7 @@
                   <a:srgbClr val="1B3B6F"/>
                 </a:solidFill>
                 <a:latin typeface="Amiri" pitchFamily="2" charset="-78"/>
+                <a:ea typeface="Amiri" pitchFamily="2" charset="-78"/>
                 <a:cs typeface="Amiri" pitchFamily="2" charset="-78"/>
               </a:rPr>
               <a:t>صَحِيحٌ أَنَّهَا تَجْمَعُ العَائِلَةَ، غَيْرَ أَنَّهَا مُكْلِفَةٌ جِدًّا، وَبَعْضُ الأُسَرِ تَقْتَرِضُ المَالَ لِأَجْلِهَا.</a:t>
@@ -14496,6 +14611,7 @@
                   <a:srgbClr val="1B3B6F"/>
                 </a:solidFill>
                 <a:latin typeface="Amiri" pitchFamily="2" charset="-78"/>
+                <a:ea typeface="Amiri" pitchFamily="2" charset="-78"/>
                 <a:cs typeface="Amiri" pitchFamily="2" charset="-78"/>
               </a:rPr>
               <a:t>هَلِ الحَفَلَاتُ الكَبِيرَةُ ضَرُورِيَّةٌ؟</a:t>
@@ -14599,6 +14715,7 @@
                   <a:srgbClr val="1B3B6F"/>
                 </a:solidFill>
                 <a:latin typeface="Amiri" pitchFamily="2" charset="-78"/>
+                <a:ea typeface="Amiri" pitchFamily="2" charset="-78"/>
                 <a:cs typeface="Amiri" pitchFamily="2" charset="-78"/>
               </a:rPr>
               <a:t>أَصْبَحَ النَّاسُ يُصَوِّرُونَ كُلَّ شَيْءٍ؛ فَمَثَلًا فِي آخِرِ عِيدِ مِيلَادٍ حَضَرْتُهُ، كَانَ الجَمِيعُ يَنْظُرُونَ إِلَى هَوَاتِفِهِمْ بَدَلًا مِنَ الكَعْكَةِ!</a:t>
@@ -14675,6 +14792,7 @@
                   <a:srgbClr val="1B3B6F"/>
                 </a:solidFill>
                 <a:latin typeface="Amiri" pitchFamily="2" charset="-78"/>
+                <a:ea typeface="Amiri" pitchFamily="2" charset="-78"/>
                 <a:cs typeface="Amiri" pitchFamily="2" charset="-78"/>
               </a:rPr>
               <a:t>كَيْفَ تُغَيِّرُ وَسَائِلُ التَّوَاصُلِ احْتِفَالَاتِنَا؟</a:t>
@@ -14778,6 +14896,7 @@
                   <a:srgbClr val="1B3B6F"/>
                 </a:solidFill>
                 <a:latin typeface="Amiri" pitchFamily="2" charset="-78"/>
+                <a:ea typeface="Amiri" pitchFamily="2" charset="-78"/>
                 <a:cs typeface="Amiri" pitchFamily="2" charset="-78"/>
               </a:rPr>
               <a:t>لَوْ نَظَّمْتُ حَفْلَةً مِثَالِيَّةً، لَجَعَلْتُهَا فِي الهَوَاءِ الطَّلْقِ، وَلَطَلَبْتُ مِنَ الضُّيُوفِ أَنْ يَتْرُكُوا هَوَاتِفَهُمْ عِنْدَ البَابِ.</a:t>
@@ -14854,6 +14973,7 @@
                   <a:srgbClr val="1B3B6F"/>
                 </a:solidFill>
                 <a:latin typeface="Amiri" pitchFamily="2" charset="-78"/>
+                <a:ea typeface="Amiri" pitchFamily="2" charset="-78"/>
                 <a:cs typeface="Amiri" pitchFamily="2" charset="-78"/>
               </a:rPr>
               <a:t>لَوْ نَظَّمْتَ حَفْلَةً مِثَالِيَّةً، كَيْفَ تَكُونُ؟</a:t>
@@ -15063,6 +15183,7 @@
                   <a:srgbClr val="D4AF37"/>
                 </a:solidFill>
                 <a:latin typeface="Amiri" pitchFamily="2" charset="-78"/>
+                <a:ea typeface="Amiri" pitchFamily="2" charset="-78"/>
                 <a:cs typeface="Amiri" pitchFamily="2" charset="-78"/>
               </a:rPr>
               <a:t>م</a:t>
@@ -15383,6 +15504,7 @@
                   <a:srgbClr val="8A6D1E"/>
                 </a:solidFill>
                 <a:latin typeface="Amiri" pitchFamily="2" charset="-78"/>
+                <a:ea typeface="Amiri" pitchFamily="2" charset="-78"/>
                 <a:cs typeface="Amiri" pitchFamily="2" charset="-78"/>
               </a:rPr>
               <a:t>المُنَاسَبَاتُ</a:t>
@@ -15663,6 +15785,7 @@
                   <a:srgbClr val="1B3B6F"/>
                 </a:solidFill>
                 <a:latin typeface="Amiri" pitchFamily="2" charset="-78"/>
+                <a:ea typeface="Amiri" pitchFamily="2" charset="-78"/>
                 <a:cs typeface="Amiri" pitchFamily="2" charset="-78"/>
               </a:rPr>
               <a:t>عِيدُ مِيلَادِي فِي … وَ…</a:t>
@@ -15739,6 +15862,7 @@
                   <a:srgbClr val="1B3B6F"/>
                 </a:solidFill>
                 <a:latin typeface="Amiri" pitchFamily="2" charset="-78"/>
+                <a:ea typeface="Amiri" pitchFamily="2" charset="-78"/>
                 <a:cs typeface="Amiri" pitchFamily="2" charset="-78"/>
               </a:rPr>
               <a:t>مَتَى عِيدُ مِيلَادِكَ؟ وَكَيْفَ تَحْتَفِلُ بِهِ؟</a:t>
@@ -15907,6 +16031,7 @@
                   <a:srgbClr val="1B3B6F"/>
                 </a:solidFill>
                 <a:latin typeface="Amiri" pitchFamily="2" charset="-78"/>
+                <a:ea typeface="Amiri" pitchFamily="2" charset="-78"/>
                 <a:cs typeface="Amiri" pitchFamily="2" charset="-78"/>
               </a:rPr>
               <a:t>قَضَيْتُ عُطْلَتِي فِي …</a:t>
@@ -15983,6 +16108,7 @@
                   <a:srgbClr val="1B3B6F"/>
                 </a:solidFill>
                 <a:latin typeface="Amiri" pitchFamily="2" charset="-78"/>
+                <a:ea typeface="Amiri" pitchFamily="2" charset="-78"/>
                 <a:cs typeface="Amiri" pitchFamily="2" charset="-78"/>
               </a:rPr>
               <a:t>أَيْنَ قَضَيْتَ عُطْلَتَكَ الأَخِيرَةَ؟</a:t>
@@ -16151,6 +16277,7 @@
                   <a:srgbClr val="1B3B6F"/>
                 </a:solidFill>
                 <a:latin typeface="Amiri" pitchFamily="2" charset="-78"/>
+                <a:ea typeface="Amiri" pitchFamily="2" charset="-78"/>
                 <a:cs typeface="Amiri" pitchFamily="2" charset="-78"/>
               </a:rPr>
               <a:t>نَعَمْ / لَا، لِأَنَّ …</a:t>
@@ -16227,6 +16354,7 @@
                   <a:srgbClr val="1B3B6F"/>
                 </a:solidFill>
                 <a:latin typeface="Amiri" pitchFamily="2" charset="-78"/>
+                <a:ea typeface="Amiri" pitchFamily="2" charset="-78"/>
                 <a:cs typeface="Amiri" pitchFamily="2" charset="-78"/>
               </a:rPr>
               <a:t>هَلْ تُحِبُّ الحَفَلَاتِ؟</a:t>
@@ -16395,6 +16523,7 @@
                   <a:srgbClr val="1B3B6F"/>
                 </a:solidFill>
                 <a:latin typeface="Amiri" pitchFamily="2" charset="-78"/>
+                <a:ea typeface="Amiri" pitchFamily="2" charset="-78"/>
                 <a:cs typeface="Amiri" pitchFamily="2" charset="-78"/>
               </a:rPr>
               <a:t>فِي العِيدِ …</a:t>
@@ -16471,6 +16600,7 @@
                   <a:srgbClr val="1B3B6F"/>
                 </a:solidFill>
                 <a:latin typeface="Amiri" pitchFamily="2" charset="-78"/>
+                <a:ea typeface="Amiri" pitchFamily="2" charset="-78"/>
                 <a:cs typeface="Amiri" pitchFamily="2" charset="-78"/>
               </a:rPr>
               <a:t>مَاذَا تَفْعَلُ فِي العِيدِ؟</a:t>
@@ -16639,6 +16769,7 @@
                   <a:srgbClr val="1B3B6F"/>
                 </a:solidFill>
                 <a:latin typeface="Amiri" pitchFamily="2" charset="-78"/>
+                <a:ea typeface="Amiri" pitchFamily="2" charset="-78"/>
                 <a:cs typeface="Amiri" pitchFamily="2" charset="-78"/>
               </a:rPr>
               <a:t>سَأَزُورُ … / سَأَذْهَبُ …</a:t>
@@ -16715,6 +16846,7 @@
                   <a:srgbClr val="1B3B6F"/>
                 </a:solidFill>
                 <a:latin typeface="Amiri" pitchFamily="2" charset="-78"/>
+                <a:ea typeface="Amiri" pitchFamily="2" charset="-78"/>
                 <a:cs typeface="Amiri" pitchFamily="2" charset="-78"/>
               </a:rPr>
               <a:t>مَاذَا سَتَفْعَلُ فِي العُطْلَةِ القَادِمَةِ؟</a:t>
@@ -16869,6 +17001,7 @@
                   <a:srgbClr val="1B3B6F"/>
                 </a:solidFill>
                 <a:latin typeface="Amiri" pitchFamily="2" charset="-78"/>
+                <a:ea typeface="Amiri" pitchFamily="2" charset="-78"/>
                 <a:cs typeface="Amiri" pitchFamily="2" charset="-78"/>
               </a:rPr>
               <a:t>عَفْوًا، هَلْ يُمْكِنُ أَنْ تُعِيدَ السُّؤَالَ؟</a:t>
@@ -17002,6 +17135,7 @@
                   <a:srgbClr val="D4AF37"/>
                 </a:solidFill>
                 <a:latin typeface="Amiri" pitchFamily="2" charset="-78"/>
+                <a:ea typeface="Amiri" pitchFamily="2" charset="-78"/>
                 <a:cs typeface="Amiri" pitchFamily="2" charset="-78"/>
               </a:rPr>
               <a:t>م</a:t>
@@ -17322,6 +17456,7 @@
                   <a:srgbClr val="8A6D1E"/>
                 </a:solidFill>
                 <a:latin typeface="Amiri" pitchFamily="2" charset="-78"/>
+                <a:ea typeface="Amiri" pitchFamily="2" charset="-78"/>
                 <a:cs typeface="Amiri" pitchFamily="2" charset="-78"/>
               </a:rPr>
               <a:t>تَجَارِبِي</a:t>
@@ -17602,6 +17737,7 @@
                   <a:srgbClr val="1B3B6F"/>
                 </a:solidFill>
                 <a:latin typeface="Amiri" pitchFamily="2" charset="-78"/>
+                <a:ea typeface="Amiri" pitchFamily="2" charset="-78"/>
                 <a:cs typeface="Amiri" pitchFamily="2" charset="-78"/>
               </a:rPr>
               <a:t>ذَهَبْتُ إِلَى … أَوَّلًا … ثُمَّ …</a:t>
@@ -17678,6 +17814,7 @@
                   <a:srgbClr val="1B3B6F"/>
                 </a:solidFill>
                 <a:latin typeface="Amiri" pitchFamily="2" charset="-78"/>
+                <a:ea typeface="Amiri" pitchFamily="2" charset="-78"/>
                 <a:cs typeface="Amiri" pitchFamily="2" charset="-78"/>
               </a:rPr>
               <a:t>صِفْ آخِرَ حَفْلَةٍ ذَهَبْتَ إِلَيْهَا.</a:t>
@@ -17781,6 +17918,7 @@
                   <a:srgbClr val="1B3B6F"/>
                 </a:solidFill>
                 <a:latin typeface="Amiri" pitchFamily="2" charset="-78"/>
+                <a:ea typeface="Amiri" pitchFamily="2" charset="-78"/>
                 <a:cs typeface="Amiri" pitchFamily="2" charset="-78"/>
               </a:rPr>
               <a:t>أَشْكُرُهُ أَوَّلًا، ثُمَّ …</a:t>
@@ -17857,6 +17995,7 @@
                   <a:srgbClr val="1B3B6F"/>
                 </a:solidFill>
                 <a:latin typeface="Amiri" pitchFamily="2" charset="-78"/>
+                <a:ea typeface="Amiri" pitchFamily="2" charset="-78"/>
                 <a:cs typeface="Amiri" pitchFamily="2" charset="-78"/>
               </a:rPr>
               <a:t>كَيْفَ تَعْتَذِرُ عَنْ دَعْوَةٍ بِأَدَبٍ؟</a:t>
@@ -17960,6 +18099,7 @@
                   <a:srgbClr val="1B3B6F"/>
                 </a:solidFill>
                 <a:latin typeface="Amiri" pitchFamily="2" charset="-78"/>
+                <a:ea typeface="Amiri" pitchFamily="2" charset="-78"/>
                 <a:cs typeface="Amiri" pitchFamily="2" charset="-78"/>
               </a:rPr>
               <a:t>أَجْمَلُ عُطْلَةٍ كَانَتْ … لِأَنَّ …</a:t>
@@ -18036,6 +18176,7 @@
                   <a:srgbClr val="1B3B6F"/>
                 </a:solidFill>
                 <a:latin typeface="Amiri" pitchFamily="2" charset="-78"/>
+                <a:ea typeface="Amiri" pitchFamily="2" charset="-78"/>
                 <a:cs typeface="Amiri" pitchFamily="2" charset="-78"/>
               </a:rPr>
               <a:t>مَا أَجْمَلُ عُطْلَةٍ قَضَيْتَهَا؟ لِمَاذَا؟</a:t>
@@ -18139,6 +18280,7 @@
                   <a:srgbClr val="1B3B6F"/>
                 </a:solidFill>
                 <a:latin typeface="Amiri" pitchFamily="2" charset="-78"/>
+                <a:ea typeface="Amiri" pitchFamily="2" charset="-78"/>
                 <a:cs typeface="Amiri" pitchFamily="2" charset="-78"/>
               </a:rPr>
               <a:t>نَعَمْ، فِي … عِنْدَمَا …</a:t>
@@ -18215,6 +18357,7 @@
                   <a:srgbClr val="1B3B6F"/>
                 </a:solidFill>
                 <a:latin typeface="Amiri" pitchFamily="2" charset="-78"/>
+                <a:ea typeface="Amiri" pitchFamily="2" charset="-78"/>
                 <a:cs typeface="Amiri" pitchFamily="2" charset="-78"/>
               </a:rPr>
               <a:t>هَلْ حَدَثَتْ لَكَ مُفَاجَأَةٌ جَمِيلَةٌ؟</a:t>
@@ -18318,6 +18461,7 @@
                   <a:srgbClr val="1B3B6F"/>
                 </a:solidFill>
                 <a:latin typeface="Amiri" pitchFamily="2" charset="-78"/>
+                <a:ea typeface="Amiri" pitchFamily="2" charset="-78"/>
                 <a:cs typeface="Amiri" pitchFamily="2" charset="-78"/>
               </a:rPr>
               <a:t>أَوَّلًا سَأَعْمَلُ … ثُمَّ …</a:t>
@@ -18394,6 +18538,7 @@
                   <a:srgbClr val="1B3B6F"/>
                 </a:solidFill>
                 <a:latin typeface="Amiri" pitchFamily="2" charset="-78"/>
+                <a:ea typeface="Amiri" pitchFamily="2" charset="-78"/>
                 <a:cs typeface="Amiri" pitchFamily="2" charset="-78"/>
               </a:rPr>
               <a:t>مَا خُطَطُكَ لِلصَّيْفِ؟</a:t>
@@ -18603,6 +18748,7 @@
                   <a:srgbClr val="D4AF37"/>
                 </a:solidFill>
                 <a:latin typeface="Amiri" pitchFamily="2" charset="-78"/>
+                <a:ea typeface="Amiri" pitchFamily="2" charset="-78"/>
                 <a:cs typeface="Amiri" pitchFamily="2" charset="-78"/>
               </a:rPr>
               <a:t>م</a:t>
@@ -18923,6 +19069,7 @@
                   <a:srgbClr val="8A6D1E"/>
                 </a:solidFill>
                 <a:latin typeface="Amiri" pitchFamily="2" charset="-78"/>
+                <a:ea typeface="Amiri" pitchFamily="2" charset="-78"/>
                 <a:cs typeface="Amiri" pitchFamily="2" charset="-78"/>
               </a:rPr>
               <a:t>المُنَاسَبَاتُ وَالمُجْتَمَعُ</a:t>
@@ -19203,6 +19350,7 @@
                   <a:srgbClr val="1B3B6F"/>
                 </a:solidFill>
                 <a:latin typeface="Amiri" pitchFamily="2" charset="-78"/>
+                <a:ea typeface="Amiri" pitchFamily="2" charset="-78"/>
                 <a:cs typeface="Amiri" pitchFamily="2" charset="-78"/>
               </a:rPr>
               <a:t>لِأَنَّهَا … وَلِأَنَّ …</a:t>
@@ -19279,6 +19427,7 @@
                   <a:srgbClr val="1B3B6F"/>
                 </a:solidFill>
                 <a:latin typeface="Amiri" pitchFamily="2" charset="-78"/>
+                <a:ea typeface="Amiri" pitchFamily="2" charset="-78"/>
                 <a:cs typeface="Amiri" pitchFamily="2" charset="-78"/>
               </a:rPr>
               <a:t>لِمَاذَا تُعْتَبَرُ المُنَاسَبَاتُ العَائِلِيَّةُ مُهِمَّةً؟</a:t>
@@ -19382,6 +19531,7 @@
                   <a:srgbClr val="1B3B6F"/>
                 </a:solidFill>
                 <a:latin typeface="Amiri" pitchFamily="2" charset="-78"/>
+                <a:ea typeface="Amiri" pitchFamily="2" charset="-78"/>
                 <a:cs typeface="Amiri" pitchFamily="2" charset="-78"/>
               </a:rPr>
               <a:t>صَحِيحٌ أَنَّ … غَيْرَ أَنَّ …</a:t>
@@ -19458,6 +19608,7 @@
                   <a:srgbClr val="1B3B6F"/>
                 </a:solidFill>
                 <a:latin typeface="Amiri" pitchFamily="2" charset="-78"/>
+                <a:ea typeface="Amiri" pitchFamily="2" charset="-78"/>
                 <a:cs typeface="Amiri" pitchFamily="2" charset="-78"/>
               </a:rPr>
               <a:t>هَلِ الهَدَايَا الغَالِيَةُ أَفْضَلُ مِنَ البَسِيطَةِ؟</a:t>
@@ -19561,6 +19712,7 @@
                   <a:srgbClr val="1B3B6F"/>
                 </a:solidFill>
                 <a:latin typeface="Amiri" pitchFamily="2" charset="-78"/>
+                <a:ea typeface="Amiri" pitchFamily="2" charset="-78"/>
                 <a:cs typeface="Amiri" pitchFamily="2" charset="-78"/>
               </a:rPr>
               <a:t>كَانُوا … أَمَّا نَحْنُ فَنَشْتَرِي …</a:t>
@@ -19637,6 +19789,7 @@
                   <a:srgbClr val="1B3B6F"/>
                 </a:solidFill>
                 <a:latin typeface="Amiri" pitchFamily="2" charset="-78"/>
+                <a:ea typeface="Amiri" pitchFamily="2" charset="-78"/>
                 <a:cs typeface="Amiri" pitchFamily="2" charset="-78"/>
               </a:rPr>
               <a:t>كَيْفَ كَانَ أَجْدَادُكَ يَحْتَفِلُونَ بِالعِيدِ؟</a:t>
@@ -19740,6 +19893,7 @@
                   <a:srgbClr val="1B3B6F"/>
                 </a:solidFill>
                 <a:latin typeface="Amiri" pitchFamily="2" charset="-78"/>
+                <a:ea typeface="Amiri" pitchFamily="2" charset="-78"/>
                 <a:cs typeface="Amiri" pitchFamily="2" charset="-78"/>
               </a:rPr>
               <a:t>عِنْدَمَا … فَهِمْتُ أَنَّ …</a:t>
@@ -19816,6 +19970,7 @@
                   <a:srgbClr val="1B3B6F"/>
                 </a:solidFill>
                 <a:latin typeface="Amiri" pitchFamily="2" charset="-78"/>
+                <a:ea typeface="Amiri" pitchFamily="2" charset="-78"/>
                 <a:cs typeface="Amiri" pitchFamily="2" charset="-78"/>
               </a:rPr>
               <a:t>صِفْ تَجْرِبَةً غَيَّرَتْ نَظْرَتَكَ إِلَى شَيْءٍ.</a:t>
@@ -19919,6 +20074,7 @@
                   <a:srgbClr val="1B3B6F"/>
                 </a:solidFill>
                 <a:latin typeface="Amiri" pitchFamily="2" charset="-78"/>
+                <a:ea typeface="Amiri" pitchFamily="2" charset="-78"/>
                 <a:cs typeface="Amiri" pitchFamily="2" charset="-78"/>
               </a:rPr>
               <a:t>لَوْ دَعَوْتُ …، لَدَعَوْتُ …</a:t>
@@ -19995,6 +20151,7 @@
                   <a:srgbClr val="1B3B6F"/>
                 </a:solidFill>
                 <a:latin typeface="Amiri" pitchFamily="2" charset="-78"/>
+                <a:ea typeface="Amiri" pitchFamily="2" charset="-78"/>
                 <a:cs typeface="Amiri" pitchFamily="2" charset="-78"/>
               </a:rPr>
               <a:t>لَوْ دَعَوْتَ ثَلَاثَةَ أَشْخَاصٍ مَشْهُورِينَ إِلَى العَشَاءِ، مَنْ تَدْعُو؟</a:t>
@@ -20204,6 +20361,7 @@
                   <a:srgbClr val="D4AF37"/>
                 </a:solidFill>
                 <a:latin typeface="Amiri" pitchFamily="2" charset="-78"/>
+                <a:ea typeface="Amiri" pitchFamily="2" charset="-78"/>
                 <a:cs typeface="Amiri" pitchFamily="2" charset="-78"/>
               </a:rPr>
               <a:t>م</a:t>
@@ -20524,6 +20682,7 @@
                   <a:srgbClr val="8A6D1E"/>
                 </a:solidFill>
                 <a:latin typeface="Amiri" pitchFamily="2" charset="-78"/>
+                <a:ea typeface="Amiri" pitchFamily="2" charset="-78"/>
                 <a:cs typeface="Amiri" pitchFamily="2" charset="-78"/>
               </a:rPr>
               <a:t>آدَابُ الصَّفِّ</a:t>
@@ -22055,6 +22214,7 @@
                   <a:srgbClr val="D4AF37"/>
                 </a:solidFill>
                 <a:latin typeface="Amiri" pitchFamily="2" charset="-78"/>
+                <a:ea typeface="Amiri" pitchFamily="2" charset="-78"/>
                 <a:cs typeface="Amiri" pitchFamily="2" charset="-78"/>
               </a:rPr>
               <a:t>م</a:t>
@@ -22375,6 +22535,7 @@
                   <a:srgbClr val="8A6D1E"/>
                 </a:solidFill>
                 <a:latin typeface="Amiri" pitchFamily="2" charset="-78"/>
+                <a:ea typeface="Amiri" pitchFamily="2" charset="-78"/>
                 <a:cs typeface="Amiri" pitchFamily="2" charset="-78"/>
               </a:rPr>
               <a:t>نَمُوذَجُ الإِجَابَةِ</a:t>
@@ -22617,6 +22778,7 @@
                   <a:srgbClr val="1B3B6F"/>
                 </a:solidFill>
                 <a:latin typeface="Amiri" pitchFamily="2" charset="-78"/>
+                <a:ea typeface="Amiri" pitchFamily="2" charset="-78"/>
                 <a:cs typeface="Amiri" pitchFamily="2" charset="-78"/>
               </a:rPr>
               <a:t>عِيدُ مِيلَادِي فِي مَايُو، وَنَأْكُلُ الكَعْكَ مَعَ الأُسْرَةِ.</a:t>
@@ -22693,6 +22855,7 @@
                   <a:srgbClr val="1B3B6F"/>
                 </a:solidFill>
                 <a:latin typeface="Amiri" pitchFamily="2" charset="-78"/>
+                <a:ea typeface="Amiri" pitchFamily="2" charset="-78"/>
                 <a:cs typeface="Amiri" pitchFamily="2" charset="-78"/>
               </a:rPr>
               <a:t>مَتَى عِيدُ مِيلَادِكَ؟ وَكَيْفَ تَحْتَفِلُ بِهِ؟</a:t>
@@ -22796,6 +22959,7 @@
                   <a:srgbClr val="1B3B6F"/>
                 </a:solidFill>
                 <a:latin typeface="Amiri" pitchFamily="2" charset="-78"/>
+                <a:ea typeface="Amiri" pitchFamily="2" charset="-78"/>
                 <a:cs typeface="Amiri" pitchFamily="2" charset="-78"/>
               </a:rPr>
               <a:t>قَضَيْتُ عُطْلَتِي فِي وِيلْزَ مَعَ أُسْرَتِي.</a:t>
@@ -22872,6 +23036,7 @@
                   <a:srgbClr val="1B3B6F"/>
                 </a:solidFill>
                 <a:latin typeface="Amiri" pitchFamily="2" charset="-78"/>
+                <a:ea typeface="Amiri" pitchFamily="2" charset="-78"/>
                 <a:cs typeface="Amiri" pitchFamily="2" charset="-78"/>
               </a:rPr>
               <a:t>أَيْنَ قَضَيْتَ عُطْلَتَكَ الأَخِيرَةَ؟</a:t>
@@ -22975,6 +23140,7 @@
                   <a:srgbClr val="1B3B6F"/>
                 </a:solidFill>
                 <a:latin typeface="Amiri" pitchFamily="2" charset="-78"/>
+                <a:ea typeface="Amiri" pitchFamily="2" charset="-78"/>
                 <a:cs typeface="Amiri" pitchFamily="2" charset="-78"/>
               </a:rPr>
               <a:t>نَعَمْ، أُحِبُّهَا، لِأَنِّي أَلْتَقِي بِأَصْدِقَائِي.</a:t>
@@ -23051,6 +23217,7 @@
                   <a:srgbClr val="1B3B6F"/>
                 </a:solidFill>
                 <a:latin typeface="Amiri" pitchFamily="2" charset="-78"/>
+                <a:ea typeface="Amiri" pitchFamily="2" charset="-78"/>
                 <a:cs typeface="Amiri" pitchFamily="2" charset="-78"/>
               </a:rPr>
               <a:t>هَلْ تُحِبُّ الحَفَلَاتِ؟</a:t>
@@ -23154,6 +23321,7 @@
                   <a:srgbClr val="1B3B6F"/>
                 </a:solidFill>
                 <a:latin typeface="Amiri" pitchFamily="2" charset="-78"/>
+                <a:ea typeface="Amiri" pitchFamily="2" charset="-78"/>
                 <a:cs typeface="Amiri" pitchFamily="2" charset="-78"/>
               </a:rPr>
               <a:t>فِي العِيدِ نُصَلِّي، ثُمَّ نَزُورُ الأَقَارِبَ.</a:t>
@@ -23230,6 +23398,7 @@
                   <a:srgbClr val="1B3B6F"/>
                 </a:solidFill>
                 <a:latin typeface="Amiri" pitchFamily="2" charset="-78"/>
+                <a:ea typeface="Amiri" pitchFamily="2" charset="-78"/>
                 <a:cs typeface="Amiri" pitchFamily="2" charset="-78"/>
               </a:rPr>
               <a:t>مَاذَا تَفْعَلُ فِي العِيدِ؟</a:t>
@@ -23333,6 +23502,7 @@
                   <a:srgbClr val="1B3B6F"/>
                 </a:solidFill>
                 <a:latin typeface="Amiri" pitchFamily="2" charset="-78"/>
+                <a:ea typeface="Amiri" pitchFamily="2" charset="-78"/>
                 <a:cs typeface="Amiri" pitchFamily="2" charset="-78"/>
               </a:rPr>
               <a:t>سَأَزُورُ جَدَّتِي فِي المَغْرِبِ.</a:t>
@@ -23409,6 +23579,7 @@
                   <a:srgbClr val="1B3B6F"/>
                 </a:solidFill>
                 <a:latin typeface="Amiri" pitchFamily="2" charset="-78"/>
+                <a:ea typeface="Amiri" pitchFamily="2" charset="-78"/>
                 <a:cs typeface="Amiri" pitchFamily="2" charset="-78"/>
               </a:rPr>
               <a:t>مَاذَا سَتَفْعَلُ فِي العُطْلَةِ القَادِمَةِ؟</a:t>
@@ -23618,6 +23789,7 @@
                   <a:srgbClr val="D4AF37"/>
                 </a:solidFill>
                 <a:latin typeface="Amiri" pitchFamily="2" charset="-78"/>
+                <a:ea typeface="Amiri" pitchFamily="2" charset="-78"/>
                 <a:cs typeface="Amiri" pitchFamily="2" charset="-78"/>
               </a:rPr>
               <a:t>م</a:t>
@@ -23938,6 +24110,7 @@
                   <a:srgbClr val="8A6D1E"/>
                 </a:solidFill>
                 <a:latin typeface="Amiri" pitchFamily="2" charset="-78"/>
+                <a:ea typeface="Amiri" pitchFamily="2" charset="-78"/>
                 <a:cs typeface="Amiri" pitchFamily="2" charset="-78"/>
               </a:rPr>
               <a:t>نَمُوذَجُ الإِجَابَةِ</a:t>
@@ -24180,6 +24353,7 @@
                   <a:srgbClr val="1B3B6F"/>
                 </a:solidFill>
                 <a:latin typeface="Amiri" pitchFamily="2" charset="-78"/>
+                <a:ea typeface="Amiri" pitchFamily="2" charset="-78"/>
                 <a:cs typeface="Amiri" pitchFamily="2" charset="-78"/>
               </a:rPr>
               <a:t>ذَهَبْتُ إِلَى حَفْلَةِ صَدِيقِي؛ أَوَّلًا أَكَلْنَا، ثُمَّ لَعِبْنَا كُرَةَ القَدَمِ، وَأَخِيرًا قَطَعْنَا الكَعْكَةَ.</a:t>
@@ -24256,6 +24430,7 @@
                   <a:srgbClr val="1B3B6F"/>
                 </a:solidFill>
                 <a:latin typeface="Amiri" pitchFamily="2" charset="-78"/>
+                <a:ea typeface="Amiri" pitchFamily="2" charset="-78"/>
                 <a:cs typeface="Amiri" pitchFamily="2" charset="-78"/>
               </a:rPr>
               <a:t>صِفْ آخِرَ حَفْلَةٍ ذَهَبْتَ إِلَيْهَا.</a:t>
@@ -24359,6 +24534,7 @@
                   <a:srgbClr val="1B3B6F"/>
                 </a:solidFill>
                 <a:latin typeface="Amiri" pitchFamily="2" charset="-78"/>
+                <a:ea typeface="Amiri" pitchFamily="2" charset="-78"/>
                 <a:cs typeface="Amiri" pitchFamily="2" charset="-78"/>
               </a:rPr>
               <a:t>أَشْكُرُهُ أَوَّلًا عَلَى الدَّعْوَةِ، ثُمَّ أَشْرَحُ السَّبَبَ، وَأَقْتَرِحُ مَوْعِدًا آخَرَ.</a:t>
@@ -24435,6 +24611,7 @@
                   <a:srgbClr val="1B3B6F"/>
                 </a:solidFill>
                 <a:latin typeface="Amiri" pitchFamily="2" charset="-78"/>
+                <a:ea typeface="Amiri" pitchFamily="2" charset="-78"/>
                 <a:cs typeface="Amiri" pitchFamily="2" charset="-78"/>
               </a:rPr>
               <a:t>كَيْفَ تَعْتَذِرُ عَنْ دَعْوَةٍ بِأَدَبٍ؟</a:t>
@@ -24538,6 +24715,7 @@
                   <a:srgbClr val="1B3B6F"/>
                 </a:solidFill>
                 <a:latin typeface="Amiri" pitchFamily="2" charset="-78"/>
+                <a:ea typeface="Amiri" pitchFamily="2" charset="-78"/>
                 <a:cs typeface="Amiri" pitchFamily="2" charset="-78"/>
               </a:rPr>
               <a:t>أَجْمَلُ عُطْلَةٍ كَانَتْ فِي تُرْكِيَا، لِأَنَّنَا رَكِبْنَا مِنْطَادًا فَوْقَ الجِبَالِ فِي الفَجْرِ.</a:t>
@@ -24614,6 +24792,7 @@
                   <a:srgbClr val="1B3B6F"/>
                 </a:solidFill>
                 <a:latin typeface="Amiri" pitchFamily="2" charset="-78"/>
+                <a:ea typeface="Amiri" pitchFamily="2" charset="-78"/>
                 <a:cs typeface="Amiri" pitchFamily="2" charset="-78"/>
               </a:rPr>
               <a:t>مَا أَجْمَلُ عُطْلَةٍ قَضَيْتَهَا؟ لِمَاذَا؟</a:t>
@@ -24717,6 +24896,7 @@
                   <a:srgbClr val="1B3B6F"/>
                 </a:solidFill>
                 <a:latin typeface="Amiri" pitchFamily="2" charset="-78"/>
+                <a:ea typeface="Amiri" pitchFamily="2" charset="-78"/>
                 <a:cs typeface="Amiri" pitchFamily="2" charset="-78"/>
               </a:rPr>
               <a:t>نَعَمْ، فِي عِيدِ مِيلَادِي الرَّابِعَ عَشَرَ، نَظَّمَ أَصْدِقَائِي حَفْلَةً سِرِّيَّةً، وَلَمْ أَعْرِفْ شَيْئًا!</a:t>
@@ -24793,6 +24973,7 @@
                   <a:srgbClr val="1B3B6F"/>
                 </a:solidFill>
                 <a:latin typeface="Amiri" pitchFamily="2" charset="-78"/>
+                <a:ea typeface="Amiri" pitchFamily="2" charset="-78"/>
                 <a:cs typeface="Amiri" pitchFamily="2" charset="-78"/>
               </a:rPr>
               <a:t>هَلْ حَدَثَتْ لَكَ مُفَاجَأَةٌ جَمِيلَةٌ؟</a:t>
@@ -24896,6 +25077,7 @@
                   <a:srgbClr val="1B3B6F"/>
                 </a:solidFill>
                 <a:latin typeface="Amiri" pitchFamily="2" charset="-78"/>
+                <a:ea typeface="Amiri" pitchFamily="2" charset="-78"/>
                 <a:cs typeface="Amiri" pitchFamily="2" charset="-78"/>
               </a:rPr>
               <a:t>أَوَّلًا سَأَعْمَلُ فِي مَحَلِّ عَمِّي، ثُمَّ سَنُسَافِرُ إِلَى الأُرْدُنِّ لِحُضُورِ زِفَافِ ابْنِ خَالِي.</a:t>
@@ -24972,6 +25154,7 @@
                   <a:srgbClr val="1B3B6F"/>
                 </a:solidFill>
                 <a:latin typeface="Amiri" pitchFamily="2" charset="-78"/>
+                <a:ea typeface="Amiri" pitchFamily="2" charset="-78"/>
                 <a:cs typeface="Amiri" pitchFamily="2" charset="-78"/>
               </a:rPr>
               <a:t>مَا خُطَطُكَ لِلصَّيْفِ؟</a:t>
@@ -25181,6 +25364,7 @@
                   <a:srgbClr val="D4AF37"/>
                 </a:solidFill>
                 <a:latin typeface="Amiri" pitchFamily="2" charset="-78"/>
+                <a:ea typeface="Amiri" pitchFamily="2" charset="-78"/>
                 <a:cs typeface="Amiri" pitchFamily="2" charset="-78"/>
               </a:rPr>
               <a:t>م</a:t>
@@ -25501,6 +25685,7 @@
                   <a:srgbClr val="8A6D1E"/>
                 </a:solidFill>
                 <a:latin typeface="Amiri" pitchFamily="2" charset="-78"/>
+                <a:ea typeface="Amiri" pitchFamily="2" charset="-78"/>
                 <a:cs typeface="Amiri" pitchFamily="2" charset="-78"/>
               </a:rPr>
               <a:t>نَمُوذَجُ الإِجَابَةِ</a:t>
@@ -25743,6 +25928,7 @@
                   <a:srgbClr val="1B3B6F"/>
                 </a:solidFill>
                 <a:latin typeface="Amiri" pitchFamily="2" charset="-78"/>
+                <a:ea typeface="Amiri" pitchFamily="2" charset="-78"/>
                 <a:cs typeface="Amiri" pitchFamily="2" charset="-78"/>
               </a:rPr>
               <a:t>لِأَنَّهَا تَجْمَعُ أَفْرَادَ العَائِلَةِ الَّذِينَ يَعِيشُونَ بَعِيدًا، وَلِأَنَّهَا تَنْقُلُ التَّقَالِيدَ مِنْ جِيلٍ إِلَى جِيلٍ.</a:t>
@@ -25819,6 +26005,7 @@
                   <a:srgbClr val="1B3B6F"/>
                 </a:solidFill>
                 <a:latin typeface="Amiri" pitchFamily="2" charset="-78"/>
+                <a:ea typeface="Amiri" pitchFamily="2" charset="-78"/>
                 <a:cs typeface="Amiri" pitchFamily="2" charset="-78"/>
               </a:rPr>
               <a:t>لِمَاذَا تُعْتَبَرُ المُنَاسَبَاتُ العَائِلِيَّةُ مُهِمَّةً؟</a:t>
@@ -25922,6 +26109,7 @@
                   <a:srgbClr val="1B3B6F"/>
                 </a:solidFill>
                 <a:latin typeface="Amiri" pitchFamily="2" charset="-78"/>
+                <a:ea typeface="Amiri" pitchFamily="2" charset="-78"/>
                 <a:cs typeface="Amiri" pitchFamily="2" charset="-78"/>
               </a:rPr>
               <a:t>صَحِيحٌ أَنَّ الهَدَايَا الغَالِيَةَ جَمِيلَةٌ، غَيْرَ أَنَّ رِسَالَةً مَكْتُوبَةً بِاليَدِ قَدْ تَبْقَى فِي القَلْبِ أَطْوَلَ.</a:t>
@@ -25998,6 +26186,7 @@
                   <a:srgbClr val="1B3B6F"/>
                 </a:solidFill>
                 <a:latin typeface="Amiri" pitchFamily="2" charset="-78"/>
+                <a:ea typeface="Amiri" pitchFamily="2" charset="-78"/>
                 <a:cs typeface="Amiri" pitchFamily="2" charset="-78"/>
               </a:rPr>
               <a:t>هَلِ الهَدَايَا الغَالِيَةُ أَفْضَلُ مِنَ البَسِيطَةِ؟</a:t>
@@ -26101,6 +26290,7 @@
                   <a:srgbClr val="1B3B6F"/>
                 </a:solidFill>
                 <a:latin typeface="Amiri" pitchFamily="2" charset="-78"/>
+                <a:ea typeface="Amiri" pitchFamily="2" charset="-78"/>
                 <a:cs typeface="Amiri" pitchFamily="2" charset="-78"/>
               </a:rPr>
               <a:t>كَانُوا يَخْبِزُونَ الكَعْكَ مَعًا لَيْلَةَ العِيدِ، وَيَزُورُونَ كُلَّ بُيُوتِ القَرْيَةِ، أَمَّا نَحْنُ فَنَشْتَرِي الحَلَوِيَّاتِ وَنُرْسِلُ التَّهَانِيَ بِالهَاتِفِ.</a:t>
@@ -26177,6 +26367,7 @@
                   <a:srgbClr val="1B3B6F"/>
                 </a:solidFill>
                 <a:latin typeface="Amiri" pitchFamily="2" charset="-78"/>
+                <a:ea typeface="Amiri" pitchFamily="2" charset="-78"/>
                 <a:cs typeface="Amiri" pitchFamily="2" charset="-78"/>
               </a:rPr>
               <a:t>كَيْفَ كَانَ أَجْدَادُكَ يَحْتَفِلُونَ بِالعِيدِ؟</a:t>
@@ -26386,6 +26577,7 @@
                   <a:srgbClr val="D4AF37"/>
                 </a:solidFill>
                 <a:latin typeface="Amiri" pitchFamily="2" charset="-78"/>
+                <a:ea typeface="Amiri" pitchFamily="2" charset="-78"/>
                 <a:cs typeface="Amiri" pitchFamily="2" charset="-78"/>
               </a:rPr>
               <a:t>م</a:t>
@@ -26706,6 +26898,7 @@
                   <a:srgbClr val="8A6D1E"/>
                 </a:solidFill>
                 <a:latin typeface="Amiri" pitchFamily="2" charset="-78"/>
+                <a:ea typeface="Amiri" pitchFamily="2" charset="-78"/>
                 <a:cs typeface="Amiri" pitchFamily="2" charset="-78"/>
               </a:rPr>
               <a:t>نَمُوذَجُ الإِجَابَةِ</a:t>
@@ -26948,6 +27141,7 @@
                   <a:srgbClr val="1B3B6F"/>
                 </a:solidFill>
                 <a:latin typeface="Amiri" pitchFamily="2" charset="-78"/>
+                <a:ea typeface="Amiri" pitchFamily="2" charset="-78"/>
                 <a:cs typeface="Amiri" pitchFamily="2" charset="-78"/>
               </a:rPr>
               <a:t>عِنْدَمَا تَطَوَّعْتُ فِي مَطْبَخٍ خَيْرِيٍّ فِي رَمَضَانَ، فَهِمْتُ أَنَّ العَطَاءَ يُفْرِحُ أَكْثَرَ مِنَ الأَخْذِ.</a:t>
@@ -27024,6 +27218,7 @@
                   <a:srgbClr val="1B3B6F"/>
                 </a:solidFill>
                 <a:latin typeface="Amiri" pitchFamily="2" charset="-78"/>
+                <a:ea typeface="Amiri" pitchFamily="2" charset="-78"/>
                 <a:cs typeface="Amiri" pitchFamily="2" charset="-78"/>
               </a:rPr>
               <a:t>صِفْ تَجْرِبَةً غَيَّرَتْ نَظْرَتَكَ إِلَى شَيْءٍ.</a:t>
@@ -27127,6 +27322,7 @@
                   <a:srgbClr val="1B3B6F"/>
                 </a:solidFill>
                 <a:latin typeface="Amiri" pitchFamily="2" charset="-78"/>
+                <a:ea typeface="Amiri" pitchFamily="2" charset="-78"/>
                 <a:cs typeface="Amiri" pitchFamily="2" charset="-78"/>
               </a:rPr>
               <a:t>لَوْ دَعَوْتُ ثَلَاثَةَ أَشْخَاصٍ، لَدَعَوْتُ ابْنَ بَطُّوطَةَ وَمُحَمَّدَ صَلَاحٍ وَعَالِمَةَ فَضَاءٍ، لِأَسْمَعَ قِصَصَ رِحْلَاتِهِمْ.</a:t>
@@ -27206,6 +27402,7 @@
                   <a:srgbClr val="1B3B6F"/>
                 </a:solidFill>
                 <a:latin typeface="Amiri" pitchFamily="2" charset="-78"/>
+                <a:ea typeface="Amiri" pitchFamily="2" charset="-78"/>
                 <a:cs typeface="Amiri" pitchFamily="2" charset="-78"/>
               </a:rPr>
               <a:t>لَوْ دَعَوْتَ ثَلَاثَةَ أَشْخَاصٍ مَشْهُورِينَ إِلَى العَشَاءِ، مَنْ تَدْعُو؟</a:t>
@@ -27415,6 +27612,7 @@
                   <a:srgbClr val="D4AF37"/>
                 </a:solidFill>
                 <a:latin typeface="Amiri" pitchFamily="2" charset="-78"/>
+                <a:ea typeface="Amiri" pitchFamily="2" charset="-78"/>
                 <a:cs typeface="Amiri" pitchFamily="2" charset="-78"/>
               </a:rPr>
               <a:t>م</a:t>
@@ -27735,6 +27933,7 @@
                   <a:srgbClr val="8A6D1E"/>
                 </a:solidFill>
                 <a:latin typeface="Amiri" pitchFamily="2" charset="-78"/>
+                <a:ea typeface="Amiri" pitchFamily="2" charset="-78"/>
                 <a:cs typeface="Amiri" pitchFamily="2" charset="-78"/>
               </a:rPr>
               <a:t>قَيِّمْ عَمَلَكَ</a:t>
@@ -28979,6 +29178,7 @@
                   <a:srgbClr val="FFFFFF"/>
                 </a:solidFill>
                 <a:latin typeface="Amiri" pitchFamily="2" charset="-78"/>
+                <a:ea typeface="Amiri" pitchFamily="2" charset="-78"/>
                 <a:cs typeface="Amiri" pitchFamily="2" charset="-78"/>
               </a:rPr>
               <a:t>أَحْسَنْتُمْ! إِلَى اللِّقَاءِ</a:t>
@@ -29131,6 +29331,7 @@
                   <a:srgbClr val="D4AF37"/>
                 </a:solidFill>
                 <a:latin typeface="Amiri" pitchFamily="2" charset="-78"/>
+                <a:ea typeface="Amiri" pitchFamily="2" charset="-78"/>
                 <a:cs typeface="Amiri" pitchFamily="2" charset="-78"/>
               </a:rPr>
               <a:t>وَرْشَةُ الكِتَابَةِ</a:t>
@@ -29264,6 +29465,7 @@
                   <a:srgbClr val="D4AF37"/>
                 </a:solidFill>
                 <a:latin typeface="Amiri" pitchFamily="2" charset="-78"/>
+                <a:ea typeface="Amiri" pitchFamily="2" charset="-78"/>
                 <a:cs typeface="Amiri" pitchFamily="2" charset="-78"/>
               </a:rPr>
               <a:t>م</a:t>
@@ -29584,6 +29786,7 @@
                   <a:srgbClr val="8A6D1E"/>
                 </a:solidFill>
                 <a:latin typeface="Amiri" pitchFamily="2" charset="-78"/>
+                <a:ea typeface="Amiri" pitchFamily="2" charset="-78"/>
                 <a:cs typeface="Amiri" pitchFamily="2" charset="-78"/>
               </a:rPr>
               <a:t>خَرِيطَةُ الوَرْشَةِ</a:t>
@@ -29898,6 +30101,7 @@
                   <a:srgbClr val="1B3B6F"/>
                 </a:solidFill>
                 <a:latin typeface="Amiri" pitchFamily="2" charset="-78"/>
+                <a:ea typeface="Amiri" pitchFamily="2" charset="-78"/>
                 <a:cs typeface="Amiri" pitchFamily="2" charset="-78"/>
               </a:rPr>
               <a:t>كَيْفَ</a:t>
@@ -30174,6 +30378,7 @@
                   <a:srgbClr val="1E6B52"/>
                 </a:solidFill>
                 <a:latin typeface="Amiri" pitchFamily="2" charset="-78"/>
+                <a:ea typeface="Amiri" pitchFamily="2" charset="-78"/>
                 <a:cs typeface="Amiri" pitchFamily="2" charset="-78"/>
               </a:rPr>
               <a:t>تَمْثِيلُ الدَّوْرِ</a:t>
@@ -30450,6 +30655,7 @@
                   <a:srgbClr val="8A6D1E"/>
                 </a:solidFill>
                 <a:latin typeface="Amiri" pitchFamily="2" charset="-78"/>
+                <a:ea typeface="Amiri" pitchFamily="2" charset="-78"/>
                 <a:cs typeface="Amiri" pitchFamily="2" charset="-78"/>
               </a:rPr>
               <a:t>النَّمُوذَجُ</a:t>
@@ -30726,6 +30932,7 @@
                   <a:srgbClr val="1E6B52"/>
                 </a:solidFill>
                 <a:latin typeface="Amiri" pitchFamily="2" charset="-78"/>
+                <a:ea typeface="Amiri" pitchFamily="2" charset="-78"/>
                 <a:cs typeface="Amiri" pitchFamily="2" charset="-78"/>
               </a:rPr>
               <a:t>المُحَادَثَةُ</a:t>
@@ -31002,6 +31209,7 @@
                   <a:srgbClr val="8A6D1E"/>
                 </a:solidFill>
                 <a:latin typeface="Amiri" pitchFamily="2" charset="-78"/>
+                <a:ea typeface="Amiri" pitchFamily="2" charset="-78"/>
                 <a:cs typeface="Amiri" pitchFamily="2" charset="-78"/>
               </a:rPr>
               <a:t>قَيِّمْ</a:t>
@@ -31245,6 +31453,7 @@
                   <a:srgbClr val="D4AF37"/>
                 </a:solidFill>
                 <a:latin typeface="Amiri" pitchFamily="2" charset="-78"/>
+                <a:ea typeface="Amiri" pitchFamily="2" charset="-78"/>
                 <a:cs typeface="Amiri" pitchFamily="2" charset="-78"/>
               </a:rPr>
               <a:t>م</a:t>
@@ -31565,6 +31774,7 @@
                   <a:srgbClr val="8A6D1E"/>
                 </a:solidFill>
                 <a:latin typeface="Amiri" pitchFamily="2" charset="-78"/>
+                <a:ea typeface="Amiri" pitchFamily="2" charset="-78"/>
                 <a:cs typeface="Amiri" pitchFamily="2" charset="-78"/>
               </a:rPr>
               <a:t>امْتِحَانُ التَّحَدُّثِ</a:t>
@@ -32189,6 +32399,7 @@
                   <a:srgbClr val="1B3B6F"/>
                 </a:solidFill>
                 <a:latin typeface="Amiri" pitchFamily="2" charset="-78"/>
+                <a:ea typeface="Amiri" pitchFamily="2" charset="-78"/>
                 <a:cs typeface="Amiri" pitchFamily="2" charset="-78"/>
               </a:rPr>
               <a:t>عَفْوًا، هَلْ يُمْكِنُ أَنْ تُعِيدَ السُّؤَالَ؟</a:t>
@@ -32288,6 +32499,7 @@
                   <a:srgbClr val="1B3B6F"/>
                 </a:solidFill>
                 <a:latin typeface="Amiri" pitchFamily="2" charset="-78"/>
+                <a:ea typeface="Amiri" pitchFamily="2" charset="-78"/>
                 <a:cs typeface="Amiri" pitchFamily="2" charset="-78"/>
               </a:rPr>
               <a:t>لَحْظَةً، دَعْنِي أُفَكِّرُ …</a:t>
@@ -32387,6 +32599,7 @@
                   <a:srgbClr val="1B3B6F"/>
                 </a:solidFill>
                 <a:latin typeface="Amiri" pitchFamily="2" charset="-78"/>
+                <a:ea typeface="Amiri" pitchFamily="2" charset="-78"/>
                 <a:cs typeface="Amiri" pitchFamily="2" charset="-78"/>
               </a:rPr>
               <a:t>أَقْصِدُ …</a:t>
@@ -32558,6 +32771,7 @@
                   <a:srgbClr val="D4AF37"/>
                 </a:solidFill>
                 <a:latin typeface="Amiri" pitchFamily="2" charset="-78"/>
+                <a:ea typeface="Amiri" pitchFamily="2" charset="-78"/>
                 <a:cs typeface="Amiri" pitchFamily="2" charset="-78"/>
               </a:rPr>
               <a:t>م</a:t>
@@ -32878,6 +33092,7 @@
                   <a:srgbClr val="8A6D1E"/>
                 </a:solidFill>
                 <a:latin typeface="Amiri" pitchFamily="2" charset="-78"/>
+                <a:ea typeface="Amiri" pitchFamily="2" charset="-78"/>
                 <a:cs typeface="Amiri" pitchFamily="2" charset="-78"/>
               </a:rPr>
               <a:t>هَلْ تُحِبُّ أَنْ تَأْتِيَ؟</a:t>
@@ -33181,6 +33396,7 @@
                   <a:srgbClr val="1B3B6F"/>
                 </a:solidFill>
                 <a:latin typeface="Amiri" pitchFamily="2" charset="-78"/>
+                <a:ea typeface="Amiri" pitchFamily="2" charset="-78"/>
                 <a:cs typeface="Amiri" pitchFamily="2" charset="-78"/>
               </a:rPr>
               <a:t>أَدْعُوكَ إِلَى حَفْلَتِي</a:t>
@@ -33338,6 +33554,7 @@
                   <a:srgbClr val="1B3B6F"/>
                 </a:solidFill>
                 <a:latin typeface="Amiri" pitchFamily="2" charset="-78"/>
+                <a:ea typeface="Amiri" pitchFamily="2" charset="-78"/>
                 <a:cs typeface="Amiri" pitchFamily="2" charset="-78"/>
               </a:rPr>
               <a:t>دَعَوْتُ</a:t>
@@ -33441,6 +33658,7 @@
                   <a:srgbClr val="1B3B6F"/>
                 </a:solidFill>
                 <a:latin typeface="Amiri" pitchFamily="2" charset="-78"/>
+                <a:ea typeface="Amiri" pitchFamily="2" charset="-78"/>
                 <a:cs typeface="Amiri" pitchFamily="2" charset="-78"/>
               </a:rPr>
               <a:t>أَدْعُوكُمْ</a:t>
@@ -33544,6 +33762,7 @@
                   <a:srgbClr val="1B3B6F"/>
                 </a:solidFill>
                 <a:latin typeface="Amiri" pitchFamily="2" charset="-78"/>
+                <a:ea typeface="Amiri" pitchFamily="2" charset="-78"/>
                 <a:cs typeface="Amiri" pitchFamily="2" charset="-78"/>
               </a:rPr>
               <a:t>أَدْعُوكِ</a:t>
@@ -33809,6 +34028,7 @@
                   <a:srgbClr val="1B3B6F"/>
                 </a:solidFill>
                 <a:latin typeface="Amiri" pitchFamily="2" charset="-78"/>
+                <a:ea typeface="Amiri" pitchFamily="2" charset="-78"/>
                 <a:cs typeface="Amiri" pitchFamily="2" charset="-78"/>
               </a:rPr>
               <a:t>بِكُلِّ سُرُورٍ!</a:t>
@@ -34128,6 +34348,7 @@
                   <a:srgbClr val="1B3B6F"/>
                 </a:solidFill>
                 <a:latin typeface="Amiri" pitchFamily="2" charset="-78"/>
+                <a:ea typeface="Amiri" pitchFamily="2" charset="-78"/>
                 <a:cs typeface="Amiri" pitchFamily="2" charset="-78"/>
               </a:rPr>
               <a:t>آسِفٌ، لَا أَسْتَطِيعُ لِأَنَّ …</a:t>
@@ -34285,6 +34506,7 @@
                   <a:srgbClr val="1B3B6F"/>
                 </a:solidFill>
                 <a:latin typeface="Amiri" pitchFamily="2" charset="-78"/>
+                <a:ea typeface="Amiri" pitchFamily="2" charset="-78"/>
                 <a:cs typeface="Amiri" pitchFamily="2" charset="-78"/>
               </a:rPr>
               <a:t>آسِفَةٌ</a:t>
@@ -34550,6 +34772,7 @@
                   <a:srgbClr val="1B3B6F"/>
                 </a:solidFill>
                 <a:latin typeface="Amiri" pitchFamily="2" charset="-78"/>
+                <a:ea typeface="Amiri" pitchFamily="2" charset="-78"/>
                 <a:cs typeface="Amiri" pitchFamily="2" charset="-78"/>
               </a:rPr>
               <a:t>حَفْلَةٌ</a:t>
@@ -34707,6 +34930,7 @@
                   <a:srgbClr val="1B3B6F"/>
                 </a:solidFill>
                 <a:latin typeface="Amiri" pitchFamily="2" charset="-78"/>
+                <a:ea typeface="Amiri" pitchFamily="2" charset="-78"/>
                 <a:cs typeface="Amiri" pitchFamily="2" charset="-78"/>
               </a:rPr>
               <a:t>حَفْلَةُ عِيدِ مِيلَادٍ</a:t>
@@ -34810,6 +35034,7 @@
                   <a:srgbClr val="1B3B6F"/>
                 </a:solidFill>
                 <a:latin typeface="Amiri" pitchFamily="2" charset="-78"/>
+                <a:ea typeface="Amiri" pitchFamily="2" charset="-78"/>
                 <a:cs typeface="Amiri" pitchFamily="2" charset="-78"/>
               </a:rPr>
               <a:t>حَفَلَاتٌ</a:t>
@@ -34913,6 +35138,7 @@
                   <a:srgbClr val="1B3B6F"/>
                 </a:solidFill>
                 <a:latin typeface="Amiri" pitchFamily="2" charset="-78"/>
+                <a:ea typeface="Amiri" pitchFamily="2" charset="-78"/>
                 <a:cs typeface="Amiri" pitchFamily="2" charset="-78"/>
               </a:rPr>
               <a:t>حَفْلَةٌ</a:t>
@@ -35178,6 +35404,7 @@
                   <a:srgbClr val="1B3B6F"/>
                 </a:solidFill>
                 <a:latin typeface="Amiri" pitchFamily="2" charset="-78"/>
+                <a:ea typeface="Amiri" pitchFamily="2" charset="-78"/>
                 <a:cs typeface="Amiri" pitchFamily="2" charset="-78"/>
               </a:rPr>
               <a:t>زِفَافٌ · عُرْسٌ</a:t>
@@ -35335,6 +35562,7 @@
                   <a:srgbClr val="1B3B6F"/>
                 </a:solidFill>
                 <a:latin typeface="Amiri" pitchFamily="2" charset="-78"/>
+                <a:ea typeface="Amiri" pitchFamily="2" charset="-78"/>
                 <a:cs typeface="Amiri" pitchFamily="2" charset="-78"/>
               </a:rPr>
               <a:t>أَعْرَاسٌ</a:t>
@@ -35600,6 +35828,7 @@
                   <a:srgbClr val="1B3B6F"/>
                 </a:solidFill>
                 <a:latin typeface="Amiri" pitchFamily="2" charset="-78"/>
+                <a:ea typeface="Amiri" pitchFamily="2" charset="-78"/>
                 <a:cs typeface="Amiri" pitchFamily="2" charset="-78"/>
               </a:rPr>
               <a:t>نَلْتَقِي</a:t>
@@ -35757,6 +35986,7 @@
                   <a:srgbClr val="1B3B6F"/>
                 </a:solidFill>
                 <a:latin typeface="Amiri" pitchFamily="2" charset="-78"/>
+                <a:ea typeface="Amiri" pitchFamily="2" charset="-78"/>
                 <a:cs typeface="Amiri" pitchFamily="2" charset="-78"/>
               </a:rPr>
               <a:t>سَنَلْتَقِي</a:t>
@@ -35860,6 +36090,7 @@
                   <a:srgbClr val="1B3B6F"/>
                 </a:solidFill>
                 <a:latin typeface="Amiri" pitchFamily="2" charset="-78"/>
+                <a:ea typeface="Amiri" pitchFamily="2" charset="-78"/>
                 <a:cs typeface="Amiri" pitchFamily="2" charset="-78"/>
               </a:rPr>
               <a:t>الْتَقَيْنَا</a:t>
@@ -35963,6 +36194,7 @@
                   <a:srgbClr val="1B3B6F"/>
                 </a:solidFill>
                 <a:latin typeface="Amiri" pitchFamily="2" charset="-78"/>
+                <a:ea typeface="Amiri" pitchFamily="2" charset="-78"/>
                 <a:cs typeface="Amiri" pitchFamily="2" charset="-78"/>
               </a:rPr>
               <a:t>أَلْتَقِي</a:t>
@@ -36096,6 +36328,7 @@
                   <a:srgbClr val="D4AF37"/>
                 </a:solidFill>
                 <a:latin typeface="Amiri" pitchFamily="2" charset="-78"/>
+                <a:ea typeface="Amiri" pitchFamily="2" charset="-78"/>
                 <a:cs typeface="Amiri" pitchFamily="2" charset="-78"/>
               </a:rPr>
               <a:t>م</a:t>
@@ -36416,6 +36649,7 @@
                   <a:srgbClr val="8A6D1E"/>
                 </a:solidFill>
                 <a:latin typeface="Amiri" pitchFamily="2" charset="-78"/>
+                <a:ea typeface="Amiri" pitchFamily="2" charset="-78"/>
                 <a:cs typeface="Amiri" pitchFamily="2" charset="-78"/>
               </a:rPr>
               <a:t>أَوَّلًا … ثُمَّ … أَخِيرًا</a:t>
@@ -36719,6 +36953,7 @@
                   <a:srgbClr val="1B3B6F"/>
                 </a:solidFill>
                 <a:latin typeface="Amiri" pitchFamily="2" charset="-78"/>
+                <a:ea typeface="Amiri" pitchFamily="2" charset="-78"/>
                 <a:cs typeface="Amiri" pitchFamily="2" charset="-78"/>
               </a:rPr>
               <a:t>احْتَفَلْنَا بِالعِيدِ</a:t>
@@ -36876,6 +37111,7 @@
                   <a:srgbClr val="1B3B6F"/>
                 </a:solidFill>
                 <a:latin typeface="Amiri" pitchFamily="2" charset="-78"/>
+                <a:ea typeface="Amiri" pitchFamily="2" charset="-78"/>
                 <a:cs typeface="Amiri" pitchFamily="2" charset="-78"/>
               </a:rPr>
               <a:t>احْتَفَلُوا</a:t>
@@ -36979,6 +37215,7 @@
                   <a:srgbClr val="1B3B6F"/>
                 </a:solidFill>
                 <a:latin typeface="Amiri" pitchFamily="2" charset="-78"/>
+                <a:ea typeface="Amiri" pitchFamily="2" charset="-78"/>
                 <a:cs typeface="Amiri" pitchFamily="2" charset="-78"/>
               </a:rPr>
               <a:t>احْتَفَلَ</a:t>
@@ -37082,6 +37319,7 @@
                   <a:srgbClr val="1B3B6F"/>
                 </a:solidFill>
                 <a:latin typeface="Amiri" pitchFamily="2" charset="-78"/>
+                <a:ea typeface="Amiri" pitchFamily="2" charset="-78"/>
                 <a:cs typeface="Amiri" pitchFamily="2" charset="-78"/>
               </a:rPr>
               <a:t>احْتَفَلْتُ</a:t>
@@ -37347,6 +37585,7 @@
                   <a:srgbClr val="1B3B6F"/>
                 </a:solidFill>
                 <a:latin typeface="Amiri" pitchFamily="2" charset="-78"/>
+                <a:ea typeface="Amiri" pitchFamily="2" charset="-78"/>
                 <a:cs typeface="Amiri" pitchFamily="2" charset="-78"/>
               </a:rPr>
               <a:t>قَضَيْنَا</a:t>
@@ -37504,6 +37743,7 @@
                   <a:srgbClr val="1B3B6F"/>
                 </a:solidFill>
                 <a:latin typeface="Amiri" pitchFamily="2" charset="-78"/>
+                <a:ea typeface="Amiri" pitchFamily="2" charset="-78"/>
                 <a:cs typeface="Amiri" pitchFamily="2" charset="-78"/>
               </a:rPr>
               <a:t>قَضَوْا</a:t>
@@ -37607,6 +37847,7 @@
                   <a:srgbClr val="1B3B6F"/>
                 </a:solidFill>
                 <a:latin typeface="Amiri" pitchFamily="2" charset="-78"/>
+                <a:ea typeface="Amiri" pitchFamily="2" charset="-78"/>
                 <a:cs typeface="Amiri" pitchFamily="2" charset="-78"/>
               </a:rPr>
               <a:t>قَضَتْ</a:t>
@@ -37710,6 +37951,7 @@
                   <a:srgbClr val="1B3B6F"/>
                 </a:solidFill>
                 <a:latin typeface="Amiri" pitchFamily="2" charset="-78"/>
+                <a:ea typeface="Amiri" pitchFamily="2" charset="-78"/>
                 <a:cs typeface="Amiri" pitchFamily="2" charset="-78"/>
               </a:rPr>
               <a:t>قَضَيْتُ</a:t>
@@ -37975,6 +38217,7 @@
                   <a:srgbClr val="1B3B6F"/>
                 </a:solidFill>
                 <a:latin typeface="Amiri" pitchFamily="2" charset="-78"/>
+                <a:ea typeface="Amiri" pitchFamily="2" charset="-78"/>
                 <a:cs typeface="Amiri" pitchFamily="2" charset="-78"/>
               </a:rPr>
               <a:t>أَوَّلًا · ثُمَّ · بَعْدَ ذٰلِكَ · أَخِيرًا</a:t>
@@ -38294,6 +38537,7 @@
                   <a:srgbClr val="1B3B6F"/>
                 </a:solidFill>
                 <a:latin typeface="Amiri" pitchFamily="2" charset="-78"/>
+                <a:ea typeface="Amiri" pitchFamily="2" charset="-78"/>
                 <a:cs typeface="Amiri" pitchFamily="2" charset="-78"/>
               </a:rPr>
               <a:t>لَا أَنْسَى</a:t>
@@ -38451,6 +38695,7 @@
                   <a:srgbClr val="1B3B6F"/>
                 </a:solidFill>
                 <a:latin typeface="Amiri" pitchFamily="2" charset="-78"/>
+                <a:ea typeface="Amiri" pitchFamily="2" charset="-78"/>
                 <a:cs typeface="Amiri" pitchFamily="2" charset="-78"/>
               </a:rPr>
               <a:t>لَنْ أَنْسَى</a:t>
@@ -38554,6 +38799,7 @@
                   <a:srgbClr val="1B3B6F"/>
                 </a:solidFill>
                 <a:latin typeface="Amiri" pitchFamily="2" charset="-78"/>
+                <a:ea typeface="Amiri" pitchFamily="2" charset="-78"/>
                 <a:cs typeface="Amiri" pitchFamily="2" charset="-78"/>
               </a:rPr>
               <a:t>لَمْ أَنْسَ</a:t>
@@ -38819,6 +39065,7 @@
                   <a:srgbClr val="1B3B6F"/>
                 </a:solidFill>
                 <a:latin typeface="Amiri" pitchFamily="2" charset="-78"/>
+                <a:ea typeface="Amiri" pitchFamily="2" charset="-78"/>
                 <a:cs typeface="Amiri" pitchFamily="2" charset="-78"/>
               </a:rPr>
               <a:t>مُفَاجَأَةٌ</a:t>
@@ -38976,6 +39223,7 @@
                   <a:srgbClr val="1B3B6F"/>
                 </a:solidFill>
                 <a:latin typeface="Amiri" pitchFamily="2" charset="-78"/>
+                <a:ea typeface="Amiri" pitchFamily="2" charset="-78"/>
                 <a:cs typeface="Amiri" pitchFamily="2" charset="-78"/>
               </a:rPr>
               <a:t>مُفَاجَآتٌ</a:t>
@@ -39079,6 +39327,7 @@
                   <a:srgbClr val="1B3B6F"/>
                 </a:solidFill>
                 <a:latin typeface="Amiri" pitchFamily="2" charset="-78"/>
+                <a:ea typeface="Amiri" pitchFamily="2" charset="-78"/>
                 <a:cs typeface="Amiri" pitchFamily="2" charset="-78"/>
               </a:rPr>
               <a:t>مُفَاجَأَةٌ</a:t>
@@ -39344,6 +39593,7 @@
                   <a:srgbClr val="1B3B6F"/>
                 </a:solidFill>
                 <a:latin typeface="Amiri" pitchFamily="2" charset="-78"/>
+                <a:ea typeface="Amiri" pitchFamily="2" charset="-78"/>
                 <a:cs typeface="Amiri" pitchFamily="2" charset="-78"/>
               </a:rPr>
               <a:t>رَائِعٌ</a:t>
@@ -39501,6 +39751,7 @@
                   <a:srgbClr val="1B3B6F"/>
                 </a:solidFill>
                 <a:latin typeface="Amiri" pitchFamily="2" charset="-78"/>
+                <a:ea typeface="Amiri" pitchFamily="2" charset="-78"/>
                 <a:cs typeface="Amiri" pitchFamily="2" charset="-78"/>
               </a:rPr>
               <a:t>رَائِعُونَ</a:t>
@@ -39604,6 +39855,7 @@
                   <a:srgbClr val="1B3B6F"/>
                 </a:solidFill>
                 <a:latin typeface="Amiri" pitchFamily="2" charset="-78"/>
+                <a:ea typeface="Amiri" pitchFamily="2" charset="-78"/>
                 <a:cs typeface="Amiri" pitchFamily="2" charset="-78"/>
               </a:rPr>
               <a:t>رَائِعَةٌ</a:t>
@@ -39707,6 +39959,7 @@
                   <a:srgbClr val="1B3B6F"/>
                 </a:solidFill>
                 <a:latin typeface="Amiri" pitchFamily="2" charset="-78"/>
+                <a:ea typeface="Amiri" pitchFamily="2" charset="-78"/>
                 <a:cs typeface="Amiri" pitchFamily="2" charset="-78"/>
               </a:rPr>
               <a:t>رَائِعٌ</a:t>
@@ -39840,6 +40093,7 @@
                   <a:srgbClr val="D4AF37"/>
                 </a:solidFill>
                 <a:latin typeface="Amiri" pitchFamily="2" charset="-78"/>
+                <a:ea typeface="Amiri" pitchFamily="2" charset="-78"/>
                 <a:cs typeface="Amiri" pitchFamily="2" charset="-78"/>
               </a:rPr>
               <a:t>م</a:t>
@@ -40160,6 +40414,7 @@
                   <a:srgbClr val="8A6D1E"/>
                 </a:solidFill>
                 <a:latin typeface="Amiri" pitchFamily="2" charset="-78"/>
+                <a:ea typeface="Amiri" pitchFamily="2" charset="-78"/>
                 <a:cs typeface="Amiri" pitchFamily="2" charset="-78"/>
               </a:rPr>
               <a:t>فِي الغُرَفِ</a:t>
@@ -41336,6 +41591,7 @@
                   <a:srgbClr val="1B3B6F"/>
                 </a:solidFill>
                 <a:latin typeface="Amiri" pitchFamily="2" charset="-78"/>
+                <a:ea typeface="Amiri" pitchFamily="2" charset="-78"/>
                 <a:cs typeface="Amiri" pitchFamily="2" charset="-78"/>
               </a:rPr>
               <a:t>دَوْرُكَ!</a:t>
@@ -41412,6 +41668,7 @@
                   <a:srgbClr val="1B3B6F"/>
                 </a:solidFill>
                 <a:latin typeface="Amiri" pitchFamily="2" charset="-78"/>
+                <a:ea typeface="Amiri" pitchFamily="2" charset="-78"/>
                 <a:cs typeface="Amiri" pitchFamily="2" charset="-78"/>
               </a:rPr>
               <a:t>أَحْسَنْتَ! / أَحْسَنْتِ!</a:t>
@@ -41488,6 +41745,7 @@
                   <a:srgbClr val="1B3B6F"/>
                 </a:solidFill>
                 <a:latin typeface="Amiri" pitchFamily="2" charset="-78"/>
+                <a:ea typeface="Amiri" pitchFamily="2" charset="-78"/>
                 <a:cs typeface="Amiri" pitchFamily="2" charset="-78"/>
               </a:rPr>
               <a:t>تَكَلَّمْ أَكْثَرَ، مِنْ فَضْلِكَ</a:t>
@@ -41564,6 +41822,7 @@
                   <a:srgbClr val="1B3B6F"/>
                 </a:solidFill>
                 <a:latin typeface="Amiri" pitchFamily="2" charset="-78"/>
+                <a:ea typeface="Amiri" pitchFamily="2" charset="-78"/>
                 <a:cs typeface="Amiri" pitchFamily="2" charset="-78"/>
               </a:rPr>
               <a:t>لِمَاذَا؟</a:t>
@@ -41735,6 +41994,7 @@
                   <a:srgbClr val="D4AF37"/>
                 </a:solidFill>
                 <a:latin typeface="Amiri" pitchFamily="2" charset="-78"/>
+                <a:ea typeface="Amiri" pitchFamily="2" charset="-78"/>
                 <a:cs typeface="Amiri" pitchFamily="2" charset="-78"/>
               </a:rPr>
               <a:t>م</a:t>
@@ -42055,6 +42315,7 @@
                   <a:srgbClr val="8A6D1E"/>
                 </a:solidFill>
                 <a:latin typeface="Amiri" pitchFamily="2" charset="-78"/>
+                <a:ea typeface="Amiri" pitchFamily="2" charset="-78"/>
                 <a:cs typeface="Amiri" pitchFamily="2" charset="-78"/>
               </a:rPr>
               <a:t>دَعْوَةٌ إِلَى حَفْلَةٍ</a:t>
@@ -42335,6 +42596,7 @@
                   <a:srgbClr val="1B3B6F"/>
                 </a:solidFill>
                 <a:latin typeface="Amiri" pitchFamily="2" charset="-78"/>
+                <a:ea typeface="Amiri" pitchFamily="2" charset="-78"/>
                 <a:cs typeface="Amiri" pitchFamily="2" charset="-78"/>
               </a:rPr>
               <a:t>أَدْعُوكَ إِلَى حَفْلَةِ عِيدِ مِيلَادِي …</a:t>
@@ -42411,6 +42673,7 @@
                   <a:srgbClr val="1B3B6F"/>
                 </a:solidFill>
                 <a:latin typeface="Amiri" pitchFamily="2" charset="-78"/>
+                <a:ea typeface="Amiri" pitchFamily="2" charset="-78"/>
                 <a:cs typeface="Amiri" pitchFamily="2" charset="-78"/>
               </a:rPr>
               <a:t>أَهْلًا! مَا الأَخْبَارُ؟</a:t>
@@ -42579,6 +42842,7 @@
                   <a:srgbClr val="1B3B6F"/>
                 </a:solidFill>
                 <a:latin typeface="Amiri" pitchFamily="2" charset="-78"/>
+                <a:ea typeface="Amiri" pitchFamily="2" charset="-78"/>
                 <a:cs typeface="Amiri" pitchFamily="2" charset="-78"/>
               </a:rPr>
               <a:t>فِي السَّاعَةِ …</a:t>
@@ -42655,6 +42919,7 @@
                   <a:srgbClr val="1B3B6F"/>
                 </a:solidFill>
                 <a:latin typeface="Amiri" pitchFamily="2" charset="-78"/>
+                <a:ea typeface="Amiri" pitchFamily="2" charset="-78"/>
                 <a:cs typeface="Amiri" pitchFamily="2" charset="-78"/>
               </a:rPr>
               <a:t>رَائِعٌ! فِي أَيِّ سَاعَةٍ؟</a:t>
@@ -42823,6 +43088,7 @@
                   <a:srgbClr val="1B3B6F"/>
                 </a:solidFill>
                 <a:latin typeface="Amiri" pitchFamily="2" charset="-78"/>
+                <a:ea typeface="Amiri" pitchFamily="2" charset="-78"/>
                 <a:cs typeface="Amiri" pitchFamily="2" charset="-78"/>
               </a:rPr>
               <a:t>فِي … قَرِيبٌ مِنْ …</a:t>
@@ -42899,6 +43165,7 @@
                   <a:srgbClr val="1B3B6F"/>
                 </a:solidFill>
                 <a:latin typeface="Amiri" pitchFamily="2" charset="-78"/>
+                <a:ea typeface="Amiri" pitchFamily="2" charset="-78"/>
                 <a:cs typeface="Amiri" pitchFamily="2" charset="-78"/>
               </a:rPr>
               <a:t>وَأَيْنَ؟</a:t>
@@ -43067,6 +43334,7 @@
                   <a:srgbClr val="1B3B6F"/>
                 </a:solidFill>
                 <a:latin typeface="Amiri" pitchFamily="2" charset="-78"/>
+                <a:ea typeface="Amiri" pitchFamily="2" charset="-78"/>
                 <a:cs typeface="Amiri" pitchFamily="2" charset="-78"/>
               </a:rPr>
               <a:t>سَنَأْكُلُ … وَسَنَلْعَبُ …</a:t>
@@ -43143,6 +43411,7 @@
                   <a:srgbClr val="1B3B6F"/>
                 </a:solidFill>
                 <a:latin typeface="Amiri" pitchFamily="2" charset="-78"/>
+                <a:ea typeface="Amiri" pitchFamily="2" charset="-78"/>
                 <a:cs typeface="Amiri" pitchFamily="2" charset="-78"/>
               </a:rPr>
               <a:t>مَاذَا سَنَفْعَلُ فِي الحَفْلَةِ؟</a:t>
@@ -43311,6 +43580,7 @@
                   <a:srgbClr val="1B3B6F"/>
                 </a:solidFill>
                 <a:latin typeface="Amiri" pitchFamily="2" charset="-78"/>
+                <a:ea typeface="Amiri" pitchFamily="2" charset="-78"/>
                 <a:cs typeface="Amiri" pitchFamily="2" charset="-78"/>
               </a:rPr>
               <a:t>لَا تُحْضِرْ شَيْئًا … / أُحِبُّ …</a:t>
@@ -43387,6 +43657,7 @@
                   <a:srgbClr val="1B3B6F"/>
                 </a:solidFill>
                 <a:latin typeface="Amiri" pitchFamily="2" charset="-78"/>
+                <a:ea typeface="Amiri" pitchFamily="2" charset="-78"/>
                 <a:cs typeface="Amiri" pitchFamily="2" charset="-78"/>
               </a:rPr>
               <a:t>مَاذَا تُرِيدُ هَدِيَّةً؟</a:t>
@@ -43661,6 +43932,7 @@
                   <a:srgbClr val="D4AF37"/>
                 </a:solidFill>
                 <a:latin typeface="Amiri" pitchFamily="2" charset="-78"/>
+                <a:ea typeface="Amiri" pitchFamily="2" charset="-78"/>
                 <a:cs typeface="Amiri" pitchFamily="2" charset="-78"/>
               </a:rPr>
               <a:t>م</a:t>
@@ -43981,6 +44253,7 @@
                   <a:srgbClr val="8A6D1E"/>
                 </a:solidFill>
                 <a:latin typeface="Amiri" pitchFamily="2" charset="-78"/>
+                <a:ea typeface="Amiri" pitchFamily="2" charset="-78"/>
                 <a:cs typeface="Amiri" pitchFamily="2" charset="-78"/>
               </a:rPr>
               <a:t>أَعْتَذِرُ عَنِ الدَّعْوَةِ</a:t>
@@ -44261,6 +44534,7 @@
                   <a:srgbClr val="1B3B6F"/>
                 </a:solidFill>
                 <a:latin typeface="Amiri" pitchFamily="2" charset="-78"/>
+                <a:ea typeface="Amiri" pitchFamily="2" charset="-78"/>
                 <a:cs typeface="Amiri" pitchFamily="2" charset="-78"/>
               </a:rPr>
               <a:t>شُكْرًا عَلَى … مَبْرُوكٌ!</a:t>
@@ -44337,6 +44611,7 @@
                   <a:srgbClr val="1B3B6F"/>
                 </a:solidFill>
                 <a:latin typeface="Amiri" pitchFamily="2" charset="-78"/>
+                <a:ea typeface="Amiri" pitchFamily="2" charset="-78"/>
                 <a:cs typeface="Amiri" pitchFamily="2" charset="-78"/>
               </a:rPr>
               <a:t>نَدْعُوكُمْ إِلَى زِفَافِ ابْنَتِنَا يَوْمَ الجُمُعَةِ.</a:t>
@@ -44505,6 +44780,7 @@
                   <a:srgbClr val="1B3B6F"/>
                 </a:solidFill>
                 <a:latin typeface="Amiri" pitchFamily="2" charset="-78"/>
+                <a:ea typeface="Amiri" pitchFamily="2" charset="-78"/>
                 <a:cs typeface="Amiri" pitchFamily="2" charset="-78"/>
               </a:rPr>
               <a:t>آسِفٌ جِدًّا، لَا نَسْتَطِيعُ لِأَنَّ …</a:t>
@@ -44581,6 +44857,7 @@
                   <a:srgbClr val="1B3B6F"/>
                 </a:solidFill>
                 <a:latin typeface="Amiri" pitchFamily="2" charset="-78"/>
+                <a:ea typeface="Amiri" pitchFamily="2" charset="-78"/>
                 <a:cs typeface="Amiri" pitchFamily="2" charset="-78"/>
               </a:rPr>
               <a:t>هَلْ سَتَأْتُونَ؟</a:t>
@@ -44749,6 +45026,7 @@
                   <a:srgbClr val="1B3B6F"/>
                 </a:solidFill>
                 <a:latin typeface="Amiri" pitchFamily="2" charset="-78"/>
+                <a:ea typeface="Amiri" pitchFamily="2" charset="-78"/>
                 <a:cs typeface="Amiri" pitchFamily="2" charset="-78"/>
               </a:rPr>
               <a:t>سَنَرْجِعُ بَعْدَ …</a:t>
@@ -44825,6 +45103,7 @@
                   <a:srgbClr val="1B3B6F"/>
                 </a:solidFill>
                 <a:latin typeface="Amiri" pitchFamily="2" charset="-78"/>
+                <a:ea typeface="Amiri" pitchFamily="2" charset="-78"/>
                 <a:cs typeface="Amiri" pitchFamily="2" charset="-78"/>
               </a:rPr>
               <a:t>لِلْأَسَفِ! وَمَتَى سَتَرْجِعُونَ؟</a:t>
@@ -44928,6 +45207,7 @@
                   <a:srgbClr val="1B3B6F"/>
                 </a:solidFill>
                 <a:latin typeface="Amiri" pitchFamily="2" charset="-78"/>
+                <a:ea typeface="Amiri" pitchFamily="2" charset="-78"/>
                 <a:cs typeface="Amiri" pitchFamily="2" charset="-78"/>
               </a:rPr>
               <a:t>مَا رَأْيُكِ أَنْ …؟</a:t>
@@ -45004,6 +45284,7 @@
                   <a:srgbClr val="1B3B6F"/>
                 </a:solidFill>
                 <a:latin typeface="Amiri" pitchFamily="2" charset="-78"/>
+                <a:ea typeface="Amiri" pitchFamily="2" charset="-78"/>
                 <a:cs typeface="Amiri" pitchFamily="2" charset="-78"/>
               </a:rPr>
               <a:t>لَا بَأْسَ، إِنْ شَاءَ اللّٰهُ تَزُورُونَنَا بَعْدَ ذٰلِكَ.</a:t>
@@ -45107,6 +45388,7 @@
                   <a:srgbClr val="1B3B6F"/>
                 </a:solidFill>
                 <a:latin typeface="Amiri" pitchFamily="2" charset="-78"/>
+                <a:ea typeface="Amiri" pitchFamily="2" charset="-78"/>
                 <a:cs typeface="Amiri" pitchFamily="2" charset="-78"/>
               </a:rPr>
               <a:t>نَعَمْ، حَضَرْتُ … وَكَانَ …</a:t>
@@ -45183,6 +45465,7 @@
                   <a:srgbClr val="1B3B6F"/>
                 </a:solidFill>
                 <a:latin typeface="Amiri" pitchFamily="2" charset="-78"/>
+                <a:ea typeface="Amiri" pitchFamily="2" charset="-78"/>
                 <a:cs typeface="Amiri" pitchFamily="2" charset="-78"/>
               </a:rPr>
               <a:t>هَلْ حَضَرْتَ زِفَافًا عَرَبِيًّا مِنْ قَبْلُ؟</a:t>
@@ -45357,13 +45640,9 @@
     <a:fontScheme name="Office">
       <a:majorFont>
         <a:latin typeface="Calibri Light" panose="020F0302020204030204"/>
-        <a:ea typeface=""/>
-        <a:cs typeface=""/>
-        <a:font script="Jpan" typeface="游ゴシック Light"/>
-        <a:font script="Hang" typeface="맑은 고딕"/>
-        <a:font script="Hans" typeface="等线 Light"/>
-        <a:font script="Hant" typeface="新細明體"/>
-        <a:font script="Arab" typeface="Times New Roman"/>
+        <a:ea typeface="Amiri" pitchFamily="2" charset="-78"/>
+        <a:cs typeface="Amiri" pitchFamily="2" charset="-78"/>
+        <a:font script="Arab" typeface="Amiri"/>
         <a:font script="Hebr" typeface="Times New Roman"/>
         <a:font script="Thai" typeface="Angsana New"/>
         <a:font script="Ethi" typeface="Nyala"/>
@@ -45409,13 +45688,9 @@
       </a:majorFont>
       <a:minorFont>
         <a:latin typeface="Calibri" panose="020F0502020204030204"/>
-        <a:ea typeface=""/>
-        <a:cs typeface=""/>
-        <a:font script="Jpan" typeface="游ゴシック"/>
-        <a:font script="Hang" typeface="맑은 고딕"/>
-        <a:font script="Hans" typeface="等线"/>
-        <a:font script="Hant" typeface="新細明體"/>
-        <a:font script="Arab" typeface="Arial"/>
+        <a:ea typeface="Amiri" pitchFamily="2" charset="-78"/>
+        <a:cs typeface="Amiri" pitchFamily="2" charset="-78"/>
+        <a:font script="Arab" typeface="Amiri"/>
         <a:font script="Hebr" typeface="Arial"/>
         <a:font script="Thai" typeface="Cordia New"/>
         <a:font script="Ethi" typeface="Nyala"/>
